--- a/exports/pptx/lessons/senior-module-02-panchabhuta/day-02-tattvas.pptx
+++ b/exports/pptx/lessons/senior-module-02-panchabhuta/day-02-tattvas.pptx
@@ -15,9 +15,13 @@
     <p:sldId id="263" r:id="rId9"/>
     <p:sldId id="264" r:id="rId10"/>
     <p:sldId id="265" r:id="rId11"/>
+    <p:sldId id="266" r:id="rId12"/>
+    <p:sldId id="267" r:id="rId13"/>
+    <p:sldId id="268" r:id="rId14"/>
+    <p:sldId id="269" r:id="rId15"/>
   </p:sldIdLst>
   <p:notesMasterIdLst>
-    <p:notesMasterId r:id="rId12"/>
+    <p:notesMasterId r:id="rId16"/>
   </p:notesMasterIdLst>
   <p:sldSz cx="9144000" cy="5143500"/>
   <p:notesSz cx="5143500" cy="9144000"/>
@@ -623,6 +627,358 @@
             <a:fld id="{F7021451-1387-4CA6-816F-3879F97B5CBC}" type="slidenum">
               <a:rPr lang="en-US"/>
               <a:t>10</a:t>
+            </a:fld>
+            <a:endParaRPr lang="en-US"/>
+          </a:p>
+        </p:txBody>
+      </p:sp>
+    </p:spTree>
+    <p:extLst>
+      <p:ext uri="{BB962C8B-B14F-4D97-AF65-F5344CB8AC3E}">
+        <p14:creationId xmlns:p14="http://schemas.microsoft.com/office/powerpoint/2010/main" val="1024086991"/>
+      </p:ext>
+    </p:extLst>
+  </p:cSld>
+  <p:clrMapOvr>
+    <a:masterClrMapping/>
+  </p:clrMapOvr>
+</p:notes>
+</file>
+
+<file path=ppt/notesSlides/notesSlide11.xml><?xml version="1.0" encoding="utf-8"?>
+<p:notes xmlns:a="http://schemas.openxmlformats.org/drawingml/2006/main" xmlns:r="http://schemas.openxmlformats.org/officeDocument/2006/relationships" xmlns:p="http://schemas.openxmlformats.org/presentationml/2006/main">
+  <p:cSld>
+    <p:spTree>
+      <p:nvGrpSpPr>
+        <p:cNvPr id="1" name=""/>
+        <p:cNvGrpSpPr/>
+        <p:nvPr/>
+      </p:nvGrpSpPr>
+      <p:grpSpPr>
+        <a:xfrm>
+          <a:off x="0" y="0"/>
+          <a:ext cx="0" cy="0"/>
+          <a:chOff x="0" y="0"/>
+          <a:chExt cx="0" cy="0"/>
+        </a:xfrm>
+      </p:grpSpPr>
+      <p:sp>
+        <p:nvSpPr>
+          <p:cNvPr id="2" name="Slide Image Placeholder 1"/>
+          <p:cNvSpPr>
+            <a:spLocks noGrp="1" noRot="1" noChangeAspect="1"/>
+          </p:cNvSpPr>
+          <p:nvPr>
+            <p:ph type="sldImg"/>
+          </p:nvPr>
+        </p:nvSpPr>
+        <p:spPr/>
+      </p:sp>
+      <p:sp>
+        <p:nvSpPr>
+          <p:cNvPr id="3" name="Notes Placeholder 2"/>
+          <p:cNvSpPr>
+            <a:spLocks noGrp="1"/>
+          </p:cNvSpPr>
+          <p:nvPr>
+            <p:ph type="body" idx="1"/>
+          </p:nvPr>
+        </p:nvSpPr>
+        <p:spPr/>
+        <p:txBody>
+          <a:bodyPr/>
+          <a:lstStyle/>
+          <a:p>
+            <a:r>
+              <a:rPr lang="en-US" dirty="0"/>
+              <a:t/>
+            </a:r>
+            <a:endParaRPr lang="en-US" dirty="0"/>
+          </a:p>
+        </p:txBody>
+      </p:sp>
+      <p:sp>
+        <p:nvSpPr>
+          <p:cNvPr id="4" name="Slide Number Placeholder 3"/>
+          <p:cNvSpPr>
+            <a:spLocks noGrp="1"/>
+          </p:cNvSpPr>
+          <p:nvPr>
+            <p:ph type="sldNum" sz="quarter" idx="10"/>
+          </p:nvPr>
+        </p:nvSpPr>
+        <p:spPr/>
+        <p:txBody>
+          <a:bodyPr/>
+          <a:lstStyle/>
+          <a:p>
+            <a:fld id="{F7021451-1387-4CA6-816F-3879F97B5CBC}" type="slidenum">
+              <a:rPr lang="en-US"/>
+              <a:t>11</a:t>
+            </a:fld>
+            <a:endParaRPr lang="en-US"/>
+          </a:p>
+        </p:txBody>
+      </p:sp>
+    </p:spTree>
+    <p:extLst>
+      <p:ext uri="{BB962C8B-B14F-4D97-AF65-F5344CB8AC3E}">
+        <p14:creationId xmlns:p14="http://schemas.microsoft.com/office/powerpoint/2010/main" val="1024086991"/>
+      </p:ext>
+    </p:extLst>
+  </p:cSld>
+  <p:clrMapOvr>
+    <a:masterClrMapping/>
+  </p:clrMapOvr>
+</p:notes>
+</file>
+
+<file path=ppt/notesSlides/notesSlide12.xml><?xml version="1.0" encoding="utf-8"?>
+<p:notes xmlns:a="http://schemas.openxmlformats.org/drawingml/2006/main" xmlns:r="http://schemas.openxmlformats.org/officeDocument/2006/relationships" xmlns:p="http://schemas.openxmlformats.org/presentationml/2006/main">
+  <p:cSld>
+    <p:spTree>
+      <p:nvGrpSpPr>
+        <p:cNvPr id="1" name=""/>
+        <p:cNvGrpSpPr/>
+        <p:nvPr/>
+      </p:nvGrpSpPr>
+      <p:grpSpPr>
+        <a:xfrm>
+          <a:off x="0" y="0"/>
+          <a:ext cx="0" cy="0"/>
+          <a:chOff x="0" y="0"/>
+          <a:chExt cx="0" cy="0"/>
+        </a:xfrm>
+      </p:grpSpPr>
+      <p:sp>
+        <p:nvSpPr>
+          <p:cNvPr id="2" name="Slide Image Placeholder 1"/>
+          <p:cNvSpPr>
+            <a:spLocks noGrp="1" noRot="1" noChangeAspect="1"/>
+          </p:cNvSpPr>
+          <p:nvPr>
+            <p:ph type="sldImg"/>
+          </p:nvPr>
+        </p:nvSpPr>
+        <p:spPr/>
+      </p:sp>
+      <p:sp>
+        <p:nvSpPr>
+          <p:cNvPr id="3" name="Notes Placeholder 2"/>
+          <p:cNvSpPr>
+            <a:spLocks noGrp="1"/>
+          </p:cNvSpPr>
+          <p:nvPr>
+            <p:ph type="body" idx="1"/>
+          </p:nvPr>
+        </p:nvSpPr>
+        <p:spPr/>
+        <p:txBody>
+          <a:bodyPr/>
+          <a:lstStyle/>
+          <a:p>
+            <a:r>
+              <a:rPr lang="en-US" dirty="0"/>
+              <a:t/>
+            </a:r>
+            <a:endParaRPr lang="en-US" dirty="0"/>
+          </a:p>
+        </p:txBody>
+      </p:sp>
+      <p:sp>
+        <p:nvSpPr>
+          <p:cNvPr id="4" name="Slide Number Placeholder 3"/>
+          <p:cNvSpPr>
+            <a:spLocks noGrp="1"/>
+          </p:cNvSpPr>
+          <p:nvPr>
+            <p:ph type="sldNum" sz="quarter" idx="10"/>
+          </p:nvPr>
+        </p:nvSpPr>
+        <p:spPr/>
+        <p:txBody>
+          <a:bodyPr/>
+          <a:lstStyle/>
+          <a:p>
+            <a:fld id="{F7021451-1387-4CA6-816F-3879F97B5CBC}" type="slidenum">
+              <a:rPr lang="en-US"/>
+              <a:t>12</a:t>
+            </a:fld>
+            <a:endParaRPr lang="en-US"/>
+          </a:p>
+        </p:txBody>
+      </p:sp>
+    </p:spTree>
+    <p:extLst>
+      <p:ext uri="{BB962C8B-B14F-4D97-AF65-F5344CB8AC3E}">
+        <p14:creationId xmlns:p14="http://schemas.microsoft.com/office/powerpoint/2010/main" val="1024086991"/>
+      </p:ext>
+    </p:extLst>
+  </p:cSld>
+  <p:clrMapOvr>
+    <a:masterClrMapping/>
+  </p:clrMapOvr>
+</p:notes>
+</file>
+
+<file path=ppt/notesSlides/notesSlide13.xml><?xml version="1.0" encoding="utf-8"?>
+<p:notes xmlns:a="http://schemas.openxmlformats.org/drawingml/2006/main" xmlns:r="http://schemas.openxmlformats.org/officeDocument/2006/relationships" xmlns:p="http://schemas.openxmlformats.org/presentationml/2006/main">
+  <p:cSld>
+    <p:spTree>
+      <p:nvGrpSpPr>
+        <p:cNvPr id="1" name=""/>
+        <p:cNvGrpSpPr/>
+        <p:nvPr/>
+      </p:nvGrpSpPr>
+      <p:grpSpPr>
+        <a:xfrm>
+          <a:off x="0" y="0"/>
+          <a:ext cx="0" cy="0"/>
+          <a:chOff x="0" y="0"/>
+          <a:chExt cx="0" cy="0"/>
+        </a:xfrm>
+      </p:grpSpPr>
+      <p:sp>
+        <p:nvSpPr>
+          <p:cNvPr id="2" name="Slide Image Placeholder 1"/>
+          <p:cNvSpPr>
+            <a:spLocks noGrp="1" noRot="1" noChangeAspect="1"/>
+          </p:cNvSpPr>
+          <p:nvPr>
+            <p:ph type="sldImg"/>
+          </p:nvPr>
+        </p:nvSpPr>
+        <p:spPr/>
+      </p:sp>
+      <p:sp>
+        <p:nvSpPr>
+          <p:cNvPr id="3" name="Notes Placeholder 2"/>
+          <p:cNvSpPr>
+            <a:spLocks noGrp="1"/>
+          </p:cNvSpPr>
+          <p:nvPr>
+            <p:ph type="body" idx="1"/>
+          </p:nvPr>
+        </p:nvSpPr>
+        <p:spPr/>
+        <p:txBody>
+          <a:bodyPr/>
+          <a:lstStyle/>
+          <a:p>
+            <a:r>
+              <a:rPr lang="en-US" dirty="0"/>
+              <a:t/>
+            </a:r>
+            <a:endParaRPr lang="en-US" dirty="0"/>
+          </a:p>
+        </p:txBody>
+      </p:sp>
+      <p:sp>
+        <p:nvSpPr>
+          <p:cNvPr id="4" name="Slide Number Placeholder 3"/>
+          <p:cNvSpPr>
+            <a:spLocks noGrp="1"/>
+          </p:cNvSpPr>
+          <p:nvPr>
+            <p:ph type="sldNum" sz="quarter" idx="10"/>
+          </p:nvPr>
+        </p:nvSpPr>
+        <p:spPr/>
+        <p:txBody>
+          <a:bodyPr/>
+          <a:lstStyle/>
+          <a:p>
+            <a:fld id="{F7021451-1387-4CA6-816F-3879F97B5CBC}" type="slidenum">
+              <a:rPr lang="en-US"/>
+              <a:t>13</a:t>
+            </a:fld>
+            <a:endParaRPr lang="en-US"/>
+          </a:p>
+        </p:txBody>
+      </p:sp>
+    </p:spTree>
+    <p:extLst>
+      <p:ext uri="{BB962C8B-B14F-4D97-AF65-F5344CB8AC3E}">
+        <p14:creationId xmlns:p14="http://schemas.microsoft.com/office/powerpoint/2010/main" val="1024086991"/>
+      </p:ext>
+    </p:extLst>
+  </p:cSld>
+  <p:clrMapOvr>
+    <a:masterClrMapping/>
+  </p:clrMapOvr>
+</p:notes>
+</file>
+
+<file path=ppt/notesSlides/notesSlide14.xml><?xml version="1.0" encoding="utf-8"?>
+<p:notes xmlns:a="http://schemas.openxmlformats.org/drawingml/2006/main" xmlns:r="http://schemas.openxmlformats.org/officeDocument/2006/relationships" xmlns:p="http://schemas.openxmlformats.org/presentationml/2006/main">
+  <p:cSld>
+    <p:spTree>
+      <p:nvGrpSpPr>
+        <p:cNvPr id="1" name=""/>
+        <p:cNvGrpSpPr/>
+        <p:nvPr/>
+      </p:nvGrpSpPr>
+      <p:grpSpPr>
+        <a:xfrm>
+          <a:off x="0" y="0"/>
+          <a:ext cx="0" cy="0"/>
+          <a:chOff x="0" y="0"/>
+          <a:chExt cx="0" cy="0"/>
+        </a:xfrm>
+      </p:grpSpPr>
+      <p:sp>
+        <p:nvSpPr>
+          <p:cNvPr id="2" name="Slide Image Placeholder 1"/>
+          <p:cNvSpPr>
+            <a:spLocks noGrp="1" noRot="1" noChangeAspect="1"/>
+          </p:cNvSpPr>
+          <p:nvPr>
+            <p:ph type="sldImg"/>
+          </p:nvPr>
+        </p:nvSpPr>
+        <p:spPr/>
+      </p:sp>
+      <p:sp>
+        <p:nvSpPr>
+          <p:cNvPr id="3" name="Notes Placeholder 2"/>
+          <p:cNvSpPr>
+            <a:spLocks noGrp="1"/>
+          </p:cNvSpPr>
+          <p:nvPr>
+            <p:ph type="body" idx="1"/>
+          </p:nvPr>
+        </p:nvSpPr>
+        <p:spPr/>
+        <p:txBody>
+          <a:bodyPr/>
+          <a:lstStyle/>
+          <a:p>
+            <a:r>
+              <a:rPr lang="en-US" dirty="0"/>
+              <a:t/>
+            </a:r>
+            <a:endParaRPr lang="en-US" dirty="0"/>
+          </a:p>
+        </p:txBody>
+      </p:sp>
+      <p:sp>
+        <p:nvSpPr>
+          <p:cNvPr id="4" name="Slide Number Placeholder 3"/>
+          <p:cNvSpPr>
+            <a:spLocks noGrp="1"/>
+          </p:cNvSpPr>
+          <p:nvPr>
+            <p:ph type="sldNum" sz="quarter" idx="10"/>
+          </p:nvPr>
+        </p:nvSpPr>
+        <p:spPr/>
+        <p:txBody>
+          <a:bodyPr/>
+          <a:lstStyle/>
+          <a:p>
+            <a:fld id="{F7021451-1387-4CA6-816F-3879F97B5CBC}" type="slidenum">
+              <a:rPr lang="en-US"/>
+              <a:t>14</a:t>
             </a:fld>
             <a:endParaRPr lang="en-US"/>
           </a:p>
@@ -1876,102 +2232,6 @@
         </p:nvSpPr>
         <p:spPr>
           <a:xfrm>
-            <a:off x="406301" y="1223963"/>
-            <a:ext cx="8498026" cy="274290"/>
-          </a:xfrm>
-          <a:prstGeom prst="rect">
-            <a:avLst/>
-          </a:prstGeom>
-          <a:noFill/>
-          <a:ln/>
-        </p:spPr>
-        <p:txBody>
-          <a:bodyPr wrap="square" lIns="0" tIns="0" rIns="0" bIns="0" rtlCol="0" anchor="t"/>
-          <a:lstStyle/>
-          <a:p>
-            <a:pPr algn="l" indent="0" marL="0">
-              <a:lnSpc>
-                <a:spcPts val="2160"/>
-              </a:lnSpc>
-              <a:spcBef>
-                <a:spcPts val="600"/>
-              </a:spcBef>
-              <a:spcAft>
-                <a:spcPts val="800"/>
-              </a:spcAft>
-              <a:buNone/>
-            </a:pPr>
-            <a:r>
-              <a:rPr lang="en-US" sz="1800" b="1" dirty="0">
-                <a:solidFill>
-                  <a:srgbClr val="997929"/>
-                </a:solidFill>
-                <a:latin typeface="Times New Roman" pitchFamily="34" charset="0"/>
-                <a:ea typeface="Times New Roman" pitchFamily="34" charset="-122"/>
-                <a:cs typeface="Times New Roman" pitchFamily="34" charset="-120"/>
-              </a:rPr>
-              <a:t>Learning objective</a:t>
-            </a:r>
-            <a:endParaRPr lang="en-US" sz="1800" dirty="0"/>
-          </a:p>
-        </p:txBody>
-      </p:sp>
-      <p:sp>
-        <p:nvSpPr>
-          <p:cNvPr id="6" name="Text 4"/>
-          <p:cNvSpPr/>
-          <p:nvPr/>
-        </p:nvSpPr>
-        <p:spPr>
-          <a:xfrm>
-            <a:off x="406301" y="1637854"/>
-            <a:ext cx="8498026" cy="213271"/>
-          </a:xfrm>
-          <a:prstGeom prst="rect">
-            <a:avLst/>
-          </a:prstGeom>
-          <a:noFill/>
-          <a:ln/>
-        </p:spPr>
-        <p:txBody>
-          <a:bodyPr wrap="square" lIns="0" tIns="0" rIns="0" bIns="0" rtlCol="0" anchor="t"/>
-          <a:lstStyle/>
-          <a:p>
-            <a:pPr algn="l" indent="0" marL="0">
-              <a:lnSpc>
-                <a:spcPts val="1680"/>
-              </a:lnSpc>
-              <a:spcBef>
-                <a:spcPts val="300"/>
-              </a:spcBef>
-              <a:spcAft>
-                <a:spcPts val="300"/>
-              </a:spcAft>
-              <a:buNone/>
-            </a:pPr>
-            <a:r>
-              <a:rPr lang="en-US" sz="1200" dirty="0">
-                <a:solidFill>
-                  <a:srgbClr val="1A1A1A"/>
-                </a:solidFill>
-                <a:latin typeface="Georgia" pitchFamily="34" charset="0"/>
-                <a:ea typeface="Georgia" pitchFamily="34" charset="-122"/>
-                <a:cs typeface="Georgia" pitchFamily="34" charset="-120"/>
-              </a:rPr>
-              <a:t>Students draw and label all 25 tattvas in the Sāṅkhya scheme, and locate the five bhūtas within the full enumeration.</a:t>
-            </a:r>
-            <a:endParaRPr lang="en-US" sz="1200" dirty="0"/>
-          </a:p>
-        </p:txBody>
-      </p:sp>
-      <p:sp>
-        <p:nvSpPr>
-          <p:cNvPr id="7" name="Text 5"/>
-          <p:cNvSpPr/>
-          <p:nvPr/>
-        </p:nvSpPr>
-        <p:spPr>
-          <a:xfrm>
             <a:off x="406301" y="4434929"/>
             <a:ext cx="8498026" cy="213271"/>
           </a:xfrm>
@@ -2116,7 +2376,7 @@
                 <a:ea typeface="Times New Roman" pitchFamily="34" charset="-122"/>
                 <a:cs typeface="Times New Roman" pitchFamily="34" charset="-120"/>
               </a:rPr>
-              <a:t>Citation(s) used</a:t>
+              <a:t>Diagram exercise (10 min)</a:t>
             </a:r>
             <a:endParaRPr lang="en-US" sz="1800" dirty="0"/>
           </a:p>
@@ -2131,7 +2391,7 @@
         <p:spPr>
           <a:xfrm>
             <a:off x="406301" y="870942"/>
-            <a:ext cx="8498026" cy="436066"/>
+            <a:ext cx="8498026" cy="213271"/>
           </a:xfrm>
           <a:prstGeom prst="rect">
             <a:avLst/>
@@ -2164,8 +2424,33 @@
                 <a:ea typeface="Georgia" pitchFamily="34" charset="-122"/>
                 <a:cs typeface="Georgia" pitchFamily="34" charset="-120"/>
               </a:rPr>
-              <a:t>– SB 3.5.36 — vidya-karana RAG cache </a:t>
-            </a:r>
+              <a:t>Students draw the 25-tattva ladder in their notebooks. Use colour to mark the five bhūtas distinctly.</a:t>
+            </a:r>
+            <a:endParaRPr lang="en-US" sz="1200" dirty="0"/>
+          </a:p>
+        </p:txBody>
+      </p:sp>
+      <p:sp>
+        <p:nvSpPr>
+          <p:cNvPr id="5" name="Text 3"/>
+          <p:cNvSpPr/>
+          <p:nvPr/>
+        </p:nvSpPr>
+        <p:spPr>
+          <a:xfrm>
+            <a:off x="406301" y="4434929"/>
+            <a:ext cx="8498026" cy="213271"/>
+          </a:xfrm>
+          <a:prstGeom prst="rect">
+            <a:avLst/>
+          </a:prstGeom>
+          <a:noFill/>
+          <a:ln/>
+        </p:spPr>
+        <p:txBody>
+          <a:bodyPr wrap="square" lIns="0" tIns="0" rIns="0" bIns="0" rtlCol="0" anchor="t"/>
+          <a:lstStyle/>
+          <a:p>
             <a:pPr algn="l" indent="0" marL="0">
               <a:lnSpc>
                 <a:spcPts val="1680"/>
@@ -2187,19 +2472,152 @@
                 <a:ea typeface="Georgia" pitchFamily="34" charset="-122"/>
                 <a:cs typeface="Georgia" pitchFamily="34" charset="-120"/>
               </a:rPr>
-              <a:t>day-02-creation.json#chunks[1]</a:t>
-            </a:r>
-            <a:pPr algn="l" indent="0" marL="0">
-              <a:lnSpc>
-                <a:spcPts val="1680"/>
+              <a:t>Senior ·  · IKS Curriculum</a:t>
+            </a:r>
+            <a:endParaRPr lang="en-US" sz="1200" dirty="0"/>
+          </a:p>
+        </p:txBody>
+      </p:sp>
+    </p:spTree>
+  </p:cSld>
+  <p:clrMapOvr>
+    <a:masterClrMapping/>
+  </p:clrMapOvr>
+</p:sld>
+</file>
+
+<file path=ppt/slides/slide11.xml><?xml version="1.0" encoding="utf-8"?>
+<p:sld xmlns:a="http://schemas.openxmlformats.org/drawingml/2006/main" xmlns:r="http://schemas.openxmlformats.org/officeDocument/2006/relationships" xmlns:p="http://schemas.openxmlformats.org/presentationml/2006/main">
+  <p:cSld name="Slide 11">
+    <p:bg>
+      <p:bgPr>
+        <a:solidFill>
+          <a:srgbClr val="FAF7F2"/>
+        </a:solidFill>
+      </p:bgPr>
+    </p:bg>
+    <p:spTree>
+      <p:nvGrpSpPr>
+        <p:cNvPr id="1" name=""/>
+        <p:cNvGrpSpPr/>
+        <p:nvPr/>
+      </p:nvGrpSpPr>
+      <p:grpSpPr>
+        <a:xfrm>
+          <a:off x="0" y="0"/>
+          <a:ext cx="0" cy="0"/>
+          <a:chOff x="0" y="0"/>
+          <a:chExt cx="0" cy="0"/>
+        </a:xfrm>
+      </p:grpSpPr>
+      <p:sp>
+        <p:nvSpPr>
+          <p:cNvPr id="2" name="Text 0"/>
+          <p:cNvSpPr/>
+          <p:nvPr/>
+        </p:nvSpPr>
+        <p:spPr>
+          <a:xfrm>
+            <a:off x="0" y="0"/>
+            <a:ext cx="9144000" cy="101501"/>
+          </a:xfrm>
+          <a:prstGeom prst="rect">
+            <a:avLst/>
+          </a:prstGeom>
+          <a:solidFill>
+            <a:srgbClr val="5D1D2E"/>
+          </a:solidFill>
+          <a:ln/>
+        </p:spPr>
+        <p:txBody>
+          <a:bodyPr wrap="square" rtlCol="0" anchor="ctr"/>
+          <a:lstStyle/>
+          <a:p>
+            <a:pPr indent="0" marL="0">
+              <a:buNone/>
+            </a:pPr>
+            <a:endParaRPr lang="en-US" dirty="0"/>
+          </a:p>
+        </p:txBody>
+      </p:sp>
+      <p:sp>
+        <p:nvSpPr>
+          <p:cNvPr id="3" name="Text 1"/>
+          <p:cNvSpPr/>
+          <p:nvPr/>
+        </p:nvSpPr>
+        <p:spPr>
+          <a:xfrm>
+            <a:off x="406301" y="457051"/>
+            <a:ext cx="8498026" cy="274290"/>
+          </a:xfrm>
+          <a:prstGeom prst="rect">
+            <a:avLst/>
+          </a:prstGeom>
+          <a:noFill/>
+          <a:ln/>
+        </p:spPr>
+        <p:txBody>
+          <a:bodyPr wrap="square" lIns="0" tIns="0" rIns="0" bIns="0" rtlCol="0" anchor="t"/>
+          <a:lstStyle/>
+          <a:p>
+            <a:pPr algn="l" indent="0" marL="0">
+              <a:lnSpc>
+                <a:spcPts val="2160"/>
               </a:lnSpc>
               <a:spcBef>
-                <a:spcPts val="300"/>
+                <a:spcPts val="600"/>
               </a:spcBef>
               <a:spcAft>
-                <a:spcPts val="300"/>
-              </a:spcAft>
-              <a:buNone/>
+                <a:spcPts val="800"/>
+              </a:spcAft>
+              <a:buNone/>
+            </a:pPr>
+            <a:r>
+              <a:rPr lang="en-US" sz="1800" b="1" dirty="0">
+                <a:solidFill>
+                  <a:srgbClr val="997929"/>
+                </a:solidFill>
+                <a:latin typeface="Times New Roman" pitchFamily="34" charset="0"/>
+                <a:ea typeface="Times New Roman" pitchFamily="34" charset="-122"/>
+                <a:cs typeface="Times New Roman" pitchFamily="34" charset="-120"/>
+              </a:rPr>
+              <a:t>Wrap-up (5 min)</a:t>
+            </a:r>
+            <a:endParaRPr lang="en-US" sz="1800" dirty="0"/>
+          </a:p>
+        </p:txBody>
+      </p:sp>
+      <p:sp>
+        <p:nvSpPr>
+          <p:cNvPr id="4" name="Text 2"/>
+          <p:cNvSpPr/>
+          <p:nvPr/>
+        </p:nvSpPr>
+        <p:spPr>
+          <a:xfrm>
+            <a:off x="634901" y="883593"/>
+            <a:ext cx="8102798" cy="525661"/>
+          </a:xfrm>
+          <a:prstGeom prst="rect">
+            <a:avLst/>
+          </a:prstGeom>
+          <a:noFill/>
+          <a:ln/>
+        </p:spPr>
+        <p:txBody>
+          <a:bodyPr wrap="square" lIns="0" tIns="0" rIns="0" bIns="0" rtlCol="0" anchor="t"/>
+          <a:lstStyle/>
+          <a:p>
+            <a:pPr algn="l" marL="342900" indent="-342900">
+              <a:lnSpc>
+                <a:spcPts val="1620"/>
+              </a:lnSpc>
+              <a:spcAft>
+                <a:spcPts val="300"/>
+              </a:spcAft>
+              <a:buSzPct val="100000"/>
+              <a:buChar char="•"/>
             </a:pPr>
             <a:r>
               <a:rPr lang="en-US" sz="1200" dirty="0">
@@ -2210,22 +2628,23 @@
                 <a:ea typeface="Georgia" pitchFamily="34" charset="-122"/>
                 <a:cs typeface="Georgia" pitchFamily="34" charset="-120"/>
               </a:rPr>
-              <a:t> – Larson, </a:t>
-            </a:r>
-            <a:pPr algn="l" indent="0" marL="0">
-              <a:lnSpc>
-                <a:spcPts val="1680"/>
-              </a:lnSpc>
-              <a:spcBef>
-                <a:spcPts val="300"/>
-              </a:spcBef>
-              <a:spcAft>
-                <a:spcPts val="300"/>
-              </a:spcAft>
-              <a:buNone/>
-            </a:pPr>
-            <a:r>
-              <a:rPr lang="en-US" sz="1200" i="1" dirty="0">
+              <a:t>Quick check: "Where do the five elements sit in the ladder?" (At the bottom — the most concrete, most manifest layer.)</a:t>
+            </a:r>
+            <a:endParaRPr lang="en-US" sz="1200" dirty="0"/>
+          </a:p>
+          <a:p>
+            <a:pPr algn="l" marL="342900" indent="-342900">
+              <a:lnSpc>
+                <a:spcPts val="1620"/>
+              </a:lnSpc>
+              <a:spcAft>
+                <a:spcPts val="300"/>
+              </a:spcAft>
+              <a:buSzPct val="100000"/>
+              <a:buChar char="•"/>
+            </a:pPr>
+            <a:r>
+              <a:rPr lang="en-US" sz="1200" dirty="0">
                 <a:solidFill>
                   <a:srgbClr val="1A1A1A"/>
                 </a:solidFill>
@@ -2233,15 +2652,1016 @@
                 <a:ea typeface="Georgia" pitchFamily="34" charset="-122"/>
                 <a:cs typeface="Georgia" pitchFamily="34" charset="-120"/>
               </a:rPr>
+              <a:t>Preview Day 3: "Tomorrow — the </a:t>
+            </a:r>
+            <a:pPr algn="l" indent="0" marL="0">
+              <a:lnSpc>
+                <a:spcPts val="1620"/>
+              </a:lnSpc>
+              <a:spcAft>
+                <a:spcPts val="300"/>
+              </a:spcAft>
+              <a:buNone/>
+            </a:pPr>
+            <a:r>
+              <a:rPr lang="en-US" sz="1200" i="1" dirty="0">
+                <a:solidFill>
+                  <a:srgbClr val="1A1A1A"/>
+                </a:solidFill>
+                <a:latin typeface="Georgia" pitchFamily="34" charset="0"/>
+                <a:ea typeface="Georgia" pitchFamily="34" charset="-122"/>
+                <a:cs typeface="Georgia" pitchFamily="34" charset="-120"/>
+              </a:rPr>
+              <a:t>bhūta-tanmātra</a:t>
+            </a:r>
+            <a:pPr algn="l" indent="0" marL="0">
+              <a:lnSpc>
+                <a:spcPts val="1620"/>
+              </a:lnSpc>
+              <a:spcAft>
+                <a:spcPts val="300"/>
+              </a:spcAft>
+              <a:buNone/>
+            </a:pPr>
+            <a:r>
+              <a:rPr lang="en-US" sz="1200" dirty="0">
+                <a:solidFill>
+                  <a:srgbClr val="1A1A1A"/>
+                </a:solidFill>
+                <a:latin typeface="Georgia" pitchFamily="34" charset="0"/>
+                <a:ea typeface="Georgia" pitchFamily="34" charset="-122"/>
+                <a:cs typeface="Georgia" pitchFamily="34" charset="-120"/>
+              </a:rPr>
+              <a:t> pairing in detail, and why the quality-count rule follows."</a:t>
+            </a:r>
+            <a:endParaRPr lang="en-US" sz="1200" dirty="0"/>
+          </a:p>
+        </p:txBody>
+      </p:sp>
+      <p:sp>
+        <p:nvSpPr>
+          <p:cNvPr id="5" name="Text 3"/>
+          <p:cNvSpPr/>
+          <p:nvPr/>
+        </p:nvSpPr>
+        <p:spPr>
+          <a:xfrm>
+            <a:off x="406301" y="4434929"/>
+            <a:ext cx="8498026" cy="213271"/>
+          </a:xfrm>
+          <a:prstGeom prst="rect">
+            <a:avLst/>
+          </a:prstGeom>
+          <a:noFill/>
+          <a:ln/>
+        </p:spPr>
+        <p:txBody>
+          <a:bodyPr wrap="square" lIns="0" tIns="0" rIns="0" bIns="0" rtlCol="0" anchor="t"/>
+          <a:lstStyle/>
+          <a:p>
+            <a:pPr algn="l" indent="0" marL="0">
+              <a:lnSpc>
+                <a:spcPts val="1680"/>
+              </a:lnSpc>
+              <a:spcBef>
+                <a:spcPts val="300"/>
+              </a:spcBef>
+              <a:spcAft>
+                <a:spcPts val="300"/>
+              </a:spcAft>
+              <a:buNone/>
+            </a:pPr>
+            <a:r>
+              <a:rPr lang="en-US" sz="1200" dirty="0">
+                <a:solidFill>
+                  <a:srgbClr val="1A1A1A"/>
+                </a:solidFill>
+                <a:latin typeface="Georgia" pitchFamily="34" charset="0"/>
+                <a:ea typeface="Georgia" pitchFamily="34" charset="-122"/>
+                <a:cs typeface="Georgia" pitchFamily="34" charset="-120"/>
+              </a:rPr>
+              <a:t>Senior ·  · IKS Curriculum</a:t>
+            </a:r>
+            <a:endParaRPr lang="en-US" sz="1200" dirty="0"/>
+          </a:p>
+        </p:txBody>
+      </p:sp>
+    </p:spTree>
+  </p:cSld>
+  <p:clrMapOvr>
+    <a:masterClrMapping/>
+  </p:clrMapOvr>
+</p:sld>
+</file>
+
+<file path=ppt/slides/slide12.xml><?xml version="1.0" encoding="utf-8"?>
+<p:sld xmlns:a="http://schemas.openxmlformats.org/drawingml/2006/main" xmlns:r="http://schemas.openxmlformats.org/officeDocument/2006/relationships" xmlns:p="http://schemas.openxmlformats.org/presentationml/2006/main">
+  <p:cSld name="Slide 12">
+    <p:bg>
+      <p:bgPr>
+        <a:solidFill>
+          <a:srgbClr val="FAF7F2"/>
+        </a:solidFill>
+      </p:bgPr>
+    </p:bg>
+    <p:spTree>
+      <p:nvGrpSpPr>
+        <p:cNvPr id="1" name=""/>
+        <p:cNvGrpSpPr/>
+        <p:nvPr/>
+      </p:nvGrpSpPr>
+      <p:grpSpPr>
+        <a:xfrm>
+          <a:off x="0" y="0"/>
+          <a:ext cx="0" cy="0"/>
+          <a:chOff x="0" y="0"/>
+          <a:chExt cx="0" cy="0"/>
+        </a:xfrm>
+      </p:grpSpPr>
+      <p:sp>
+        <p:nvSpPr>
+          <p:cNvPr id="2" name="Text 0"/>
+          <p:cNvSpPr/>
+          <p:nvPr/>
+        </p:nvSpPr>
+        <p:spPr>
+          <a:xfrm>
+            <a:off x="0" y="0"/>
+            <a:ext cx="9144000" cy="101501"/>
+          </a:xfrm>
+          <a:prstGeom prst="rect">
+            <a:avLst/>
+          </a:prstGeom>
+          <a:solidFill>
+            <a:srgbClr val="5D1D2E"/>
+          </a:solidFill>
+          <a:ln/>
+        </p:spPr>
+        <p:txBody>
+          <a:bodyPr wrap="square" rtlCol="0" anchor="ctr"/>
+          <a:lstStyle/>
+          <a:p>
+            <a:pPr indent="0" marL="0">
+              <a:buNone/>
+            </a:pPr>
+            <a:endParaRPr lang="en-US" dirty="0"/>
+          </a:p>
+        </p:txBody>
+      </p:sp>
+      <p:sp>
+        <p:nvSpPr>
+          <p:cNvPr id="3" name="Text 1"/>
+          <p:cNvSpPr/>
+          <p:nvPr/>
+        </p:nvSpPr>
+        <p:spPr>
+          <a:xfrm>
+            <a:off x="406301" y="457051"/>
+            <a:ext cx="8498026" cy="274290"/>
+          </a:xfrm>
+          <a:prstGeom prst="rect">
+            <a:avLst/>
+          </a:prstGeom>
+          <a:noFill/>
+          <a:ln/>
+        </p:spPr>
+        <p:txBody>
+          <a:bodyPr wrap="square" lIns="0" tIns="0" rIns="0" bIns="0" rtlCol="0" anchor="t"/>
+          <a:lstStyle/>
+          <a:p>
+            <a:pPr algn="l" indent="0" marL="0">
+              <a:lnSpc>
+                <a:spcPts val="2160"/>
+              </a:lnSpc>
+              <a:spcBef>
+                <a:spcPts val="600"/>
+              </a:spcBef>
+              <a:spcAft>
+                <a:spcPts val="800"/>
+              </a:spcAft>
+              <a:buNone/>
+            </a:pPr>
+            <a:r>
+              <a:rPr lang="en-US" sz="1800" b="1" dirty="0">
+                <a:solidFill>
+                  <a:srgbClr val="997929"/>
+                </a:solidFill>
+                <a:latin typeface="Times New Roman" pitchFamily="34" charset="0"/>
+                <a:ea typeface="Times New Roman" pitchFamily="34" charset="-122"/>
+                <a:cs typeface="Times New Roman" pitchFamily="34" charset="-120"/>
+              </a:rPr>
+              <a:t>Differentiation</a:t>
+            </a:r>
+            <a:endParaRPr lang="en-US" sz="1800" dirty="0"/>
+          </a:p>
+        </p:txBody>
+      </p:sp>
+      <p:sp>
+        <p:nvSpPr>
+          <p:cNvPr id="4" name="Text 2"/>
+          <p:cNvSpPr/>
+          <p:nvPr/>
+        </p:nvSpPr>
+        <p:spPr>
+          <a:xfrm>
+            <a:off x="634901" y="883593"/>
+            <a:ext cx="8102798" cy="525661"/>
+          </a:xfrm>
+          <a:prstGeom prst="rect">
+            <a:avLst/>
+          </a:prstGeom>
+          <a:noFill/>
+          <a:ln/>
+        </p:spPr>
+        <p:txBody>
+          <a:bodyPr wrap="square" lIns="0" tIns="0" rIns="0" bIns="0" rtlCol="0" anchor="t"/>
+          <a:lstStyle/>
+          <a:p>
+            <a:pPr algn="l" marL="342900" indent="-342900">
+              <a:lnSpc>
+                <a:spcPts val="1620"/>
+              </a:lnSpc>
+              <a:spcAft>
+                <a:spcPts val="300"/>
+              </a:spcAft>
+              <a:buSzPct val="100000"/>
+              <a:buChar char="•"/>
+            </a:pPr>
+            <a:r>
+              <a:rPr lang="en-US" sz="1200" b="1" dirty="0">
+                <a:solidFill>
+                  <a:srgbClr val="1A1A1A"/>
+                </a:solidFill>
+                <a:latin typeface="Georgia" pitchFamily="34" charset="0"/>
+                <a:ea typeface="Georgia" pitchFamily="34" charset="-122"/>
+                <a:cs typeface="Georgia" pitchFamily="34" charset="-120"/>
+              </a:rPr>
+              <a:t>Tier up:</a:t>
+            </a:r>
+            <a:pPr algn="l" indent="0" marL="0">
+              <a:lnSpc>
+                <a:spcPts val="1620"/>
+              </a:lnSpc>
+              <a:spcAft>
+                <a:spcPts val="300"/>
+              </a:spcAft>
+              <a:buNone/>
+            </a:pPr>
+            <a:r>
+              <a:rPr lang="en-US" sz="1200" dirty="0">
+                <a:solidFill>
+                  <a:srgbClr val="1A1A1A"/>
+                </a:solidFill>
+                <a:latin typeface="Georgia" pitchFamily="34" charset="0"/>
+                <a:ea typeface="Georgia" pitchFamily="34" charset="-122"/>
+                <a:cs typeface="Georgia" pitchFamily="34" charset="-120"/>
+              </a:rPr>
+              <a:t> Read the full first 22 verses of the Sāṅkhya Kārikā in translation. Note one verse you find puzzling.</a:t>
+            </a:r>
+            <a:endParaRPr lang="en-US" sz="1200" dirty="0"/>
+          </a:p>
+          <a:p>
+            <a:pPr algn="l" marL="342900" indent="-342900">
+              <a:lnSpc>
+                <a:spcPts val="1620"/>
+              </a:lnSpc>
+              <a:spcAft>
+                <a:spcPts val="300"/>
+              </a:spcAft>
+              <a:buSzPct val="100000"/>
+              <a:buChar char="•"/>
+            </a:pPr>
+            <a:r>
+              <a:rPr lang="en-US" sz="1200" b="1" dirty="0">
+                <a:solidFill>
+                  <a:srgbClr val="1A1A1A"/>
+                </a:solidFill>
+                <a:latin typeface="Georgia" pitchFamily="34" charset="0"/>
+                <a:ea typeface="Georgia" pitchFamily="34" charset="-122"/>
+                <a:cs typeface="Georgia" pitchFamily="34" charset="-120"/>
+              </a:rPr>
+              <a:t>Tier down:</a:t>
+            </a:r>
+            <a:pPr algn="l" indent="0" marL="0">
+              <a:lnSpc>
+                <a:spcPts val="1620"/>
+              </a:lnSpc>
+              <a:spcAft>
+                <a:spcPts val="300"/>
+              </a:spcAft>
+              <a:buNone/>
+            </a:pPr>
+            <a:r>
+              <a:rPr lang="en-US" sz="1200" dirty="0">
+                <a:solidFill>
+                  <a:srgbClr val="1A1A1A"/>
+                </a:solidFill>
+                <a:latin typeface="Georgia" pitchFamily="34" charset="0"/>
+                <a:ea typeface="Georgia" pitchFamily="34" charset="-122"/>
+                <a:cs typeface="Georgia" pitchFamily="34" charset="-120"/>
+              </a:rPr>
+              <a:t> Focus on the bhūtas + tanmātras layer. The full ladder can be a reference.</a:t>
+            </a:r>
+            <a:endParaRPr lang="en-US" sz="1200" dirty="0"/>
+          </a:p>
+        </p:txBody>
+      </p:sp>
+      <p:sp>
+        <p:nvSpPr>
+          <p:cNvPr id="5" name="Text 3"/>
+          <p:cNvSpPr/>
+          <p:nvPr/>
+        </p:nvSpPr>
+        <p:spPr>
+          <a:xfrm>
+            <a:off x="406301" y="4434929"/>
+            <a:ext cx="8498026" cy="213271"/>
+          </a:xfrm>
+          <a:prstGeom prst="rect">
+            <a:avLst/>
+          </a:prstGeom>
+          <a:noFill/>
+          <a:ln/>
+        </p:spPr>
+        <p:txBody>
+          <a:bodyPr wrap="square" lIns="0" tIns="0" rIns="0" bIns="0" rtlCol="0" anchor="t"/>
+          <a:lstStyle/>
+          <a:p>
+            <a:pPr algn="l" indent="0" marL="0">
+              <a:lnSpc>
+                <a:spcPts val="1680"/>
+              </a:lnSpc>
+              <a:spcBef>
+                <a:spcPts val="300"/>
+              </a:spcBef>
+              <a:spcAft>
+                <a:spcPts val="300"/>
+              </a:spcAft>
+              <a:buNone/>
+            </a:pPr>
+            <a:r>
+              <a:rPr lang="en-US" sz="1200" dirty="0">
+                <a:solidFill>
+                  <a:srgbClr val="1A1A1A"/>
+                </a:solidFill>
+                <a:latin typeface="Georgia" pitchFamily="34" charset="0"/>
+                <a:ea typeface="Georgia" pitchFamily="34" charset="-122"/>
+                <a:cs typeface="Georgia" pitchFamily="34" charset="-120"/>
+              </a:rPr>
+              <a:t>Senior ·  · IKS Curriculum</a:t>
+            </a:r>
+            <a:endParaRPr lang="en-US" sz="1200" dirty="0"/>
+          </a:p>
+        </p:txBody>
+      </p:sp>
+    </p:spTree>
+  </p:cSld>
+  <p:clrMapOvr>
+    <a:masterClrMapping/>
+  </p:clrMapOvr>
+</p:sld>
+</file>
+
+<file path=ppt/slides/slide13.xml><?xml version="1.0" encoding="utf-8"?>
+<p:sld xmlns:a="http://schemas.openxmlformats.org/drawingml/2006/main" xmlns:r="http://schemas.openxmlformats.org/officeDocument/2006/relationships" xmlns:p="http://schemas.openxmlformats.org/presentationml/2006/main">
+  <p:cSld name="Slide 13">
+    <p:bg>
+      <p:bgPr>
+        <a:solidFill>
+          <a:srgbClr val="FAF7F2"/>
+        </a:solidFill>
+      </p:bgPr>
+    </p:bg>
+    <p:spTree>
+      <p:nvGrpSpPr>
+        <p:cNvPr id="1" name=""/>
+        <p:cNvGrpSpPr/>
+        <p:nvPr/>
+      </p:nvGrpSpPr>
+      <p:grpSpPr>
+        <a:xfrm>
+          <a:off x="0" y="0"/>
+          <a:ext cx="0" cy="0"/>
+          <a:chOff x="0" y="0"/>
+          <a:chExt cx="0" cy="0"/>
+        </a:xfrm>
+      </p:grpSpPr>
+      <p:sp>
+        <p:nvSpPr>
+          <p:cNvPr id="2" name="Text 0"/>
+          <p:cNvSpPr/>
+          <p:nvPr/>
+        </p:nvSpPr>
+        <p:spPr>
+          <a:xfrm>
+            <a:off x="0" y="0"/>
+            <a:ext cx="9144000" cy="101501"/>
+          </a:xfrm>
+          <a:prstGeom prst="rect">
+            <a:avLst/>
+          </a:prstGeom>
+          <a:solidFill>
+            <a:srgbClr val="5D1D2E"/>
+          </a:solidFill>
+          <a:ln/>
+        </p:spPr>
+        <p:txBody>
+          <a:bodyPr wrap="square" rtlCol="0" anchor="ctr"/>
+          <a:lstStyle/>
+          <a:p>
+            <a:pPr indent="0" marL="0">
+              <a:buNone/>
+            </a:pPr>
+            <a:endParaRPr lang="en-US" dirty="0"/>
+          </a:p>
+        </p:txBody>
+      </p:sp>
+      <p:sp>
+        <p:nvSpPr>
+          <p:cNvPr id="3" name="Text 1"/>
+          <p:cNvSpPr/>
+          <p:nvPr/>
+        </p:nvSpPr>
+        <p:spPr>
+          <a:xfrm>
+            <a:off x="406301" y="457051"/>
+            <a:ext cx="8498026" cy="274290"/>
+          </a:xfrm>
+          <a:prstGeom prst="rect">
+            <a:avLst/>
+          </a:prstGeom>
+          <a:noFill/>
+          <a:ln/>
+        </p:spPr>
+        <p:txBody>
+          <a:bodyPr wrap="square" lIns="0" tIns="0" rIns="0" bIns="0" rtlCol="0" anchor="t"/>
+          <a:lstStyle/>
+          <a:p>
+            <a:pPr algn="l" indent="0" marL="0">
+              <a:lnSpc>
+                <a:spcPts val="2160"/>
+              </a:lnSpc>
+              <a:spcBef>
+                <a:spcPts val="600"/>
+              </a:spcBef>
+              <a:spcAft>
+                <a:spcPts val="800"/>
+              </a:spcAft>
+              <a:buNone/>
+            </a:pPr>
+            <a:r>
+              <a:rPr lang="en-US" sz="1800" b="1" dirty="0">
+                <a:solidFill>
+                  <a:srgbClr val="997929"/>
+                </a:solidFill>
+                <a:latin typeface="Times New Roman" pitchFamily="34" charset="0"/>
+                <a:ea typeface="Times New Roman" pitchFamily="34" charset="-122"/>
+                <a:cs typeface="Times New Roman" pitchFamily="34" charset="-120"/>
+              </a:rPr>
+              <a:t>Teacher notes</a:t>
+            </a:r>
+            <a:endParaRPr lang="en-US" sz="1800" dirty="0"/>
+          </a:p>
+        </p:txBody>
+      </p:sp>
+      <p:sp>
+        <p:nvSpPr>
+          <p:cNvPr id="4" name="Text 2"/>
+          <p:cNvSpPr/>
+          <p:nvPr/>
+        </p:nvSpPr>
+        <p:spPr>
+          <a:xfrm>
+            <a:off x="634901" y="883593"/>
+            <a:ext cx="8102798" cy="937022"/>
+          </a:xfrm>
+          <a:prstGeom prst="rect">
+            <a:avLst/>
+          </a:prstGeom>
+          <a:noFill/>
+          <a:ln/>
+        </p:spPr>
+        <p:txBody>
+          <a:bodyPr wrap="square" lIns="0" tIns="0" rIns="0" bIns="0" rtlCol="0" anchor="t"/>
+          <a:lstStyle/>
+          <a:p>
+            <a:pPr algn="l" marL="342900" indent="-342900">
+              <a:lnSpc>
+                <a:spcPts val="1620"/>
+              </a:lnSpc>
+              <a:spcAft>
+                <a:spcPts val="300"/>
+              </a:spcAft>
+              <a:buSzPct val="100000"/>
+              <a:buChar char="•"/>
+            </a:pPr>
+            <a:r>
+              <a:rPr lang="en-US" sz="1200" dirty="0">
+                <a:solidFill>
+                  <a:srgbClr val="1A1A1A"/>
+                </a:solidFill>
+                <a:latin typeface="Georgia" pitchFamily="34" charset="0"/>
+                <a:ea typeface="Georgia" pitchFamily="34" charset="-122"/>
+                <a:cs typeface="Georgia" pitchFamily="34" charset="-120"/>
+              </a:rPr>
+              <a:t>The 25-tattva count is the </a:t>
+            </a:r>
+            <a:pPr algn="l" indent="0" marL="0">
+              <a:lnSpc>
+                <a:spcPts val="1620"/>
+              </a:lnSpc>
+              <a:spcAft>
+                <a:spcPts val="300"/>
+              </a:spcAft>
+              <a:buNone/>
+            </a:pPr>
+            <a:r>
+              <a:rPr lang="en-US" sz="1200" i="1" dirty="0">
+                <a:solidFill>
+                  <a:srgbClr val="1A1A1A"/>
+                </a:solidFill>
+                <a:latin typeface="Georgia" pitchFamily="34" charset="0"/>
+                <a:ea typeface="Georgia" pitchFamily="34" charset="-122"/>
+                <a:cs typeface="Georgia" pitchFamily="34" charset="-120"/>
+              </a:rPr>
+              <a:t>classical Sāṅkhya</a:t>
+            </a:r>
+            <a:pPr algn="l" indent="0" marL="0">
+              <a:lnSpc>
+                <a:spcPts val="1620"/>
+              </a:lnSpc>
+              <a:spcAft>
+                <a:spcPts val="300"/>
+              </a:spcAft>
+              <a:buNone/>
+            </a:pPr>
+            <a:r>
+              <a:rPr lang="en-US" sz="1200" dirty="0">
+                <a:solidFill>
+                  <a:srgbClr val="1A1A1A"/>
+                </a:solidFill>
+                <a:latin typeface="Georgia" pitchFamily="34" charset="0"/>
+                <a:ea typeface="Georgia" pitchFamily="34" charset="-122"/>
+                <a:cs typeface="Georgia" pitchFamily="34" charset="-120"/>
+              </a:rPr>
+              <a:t> count (Īśvarakṛṣṇa's </a:t>
+            </a:r>
+            <a:pPr algn="l" indent="0" marL="0">
+              <a:lnSpc>
+                <a:spcPts val="1620"/>
+              </a:lnSpc>
+              <a:spcAft>
+                <a:spcPts val="300"/>
+              </a:spcAft>
+              <a:buNone/>
+            </a:pPr>
+            <a:r>
+              <a:rPr lang="en-US" sz="1200" i="1" dirty="0">
+                <a:solidFill>
+                  <a:srgbClr val="1A1A1A"/>
+                </a:solidFill>
+                <a:latin typeface="Georgia" pitchFamily="34" charset="0"/>
+                <a:ea typeface="Georgia" pitchFamily="34" charset="-122"/>
+                <a:cs typeface="Georgia" pitchFamily="34" charset="-120"/>
+              </a:rPr>
+              <a:t>Sāṅkhya Kārikā</a:t>
+            </a:r>
+            <a:pPr algn="l" indent="0" marL="0">
+              <a:lnSpc>
+                <a:spcPts val="1620"/>
+              </a:lnSpc>
+              <a:spcAft>
+                <a:spcPts val="300"/>
+              </a:spcAft>
+              <a:buNone/>
+            </a:pPr>
+            <a:r>
+              <a:rPr lang="en-US" sz="1200" dirty="0">
+                <a:solidFill>
+                  <a:srgbClr val="1A1A1A"/>
+                </a:solidFill>
+                <a:latin typeface="Georgia" pitchFamily="34" charset="0"/>
+                <a:ea typeface="Georgia" pitchFamily="34" charset="-122"/>
+                <a:cs typeface="Georgia" pitchFamily="34" charset="-120"/>
+              </a:rPr>
+              <a:t>, c. 4th c. CE). Different versions of Sāṅkhya count differently.</a:t>
+            </a:r>
+            <a:endParaRPr lang="en-US" sz="1200" dirty="0"/>
+          </a:p>
+          <a:p>
+            <a:pPr algn="l" marL="342900" indent="-342900">
+              <a:lnSpc>
+                <a:spcPts val="1620"/>
+              </a:lnSpc>
+              <a:spcAft>
+                <a:spcPts val="300"/>
+              </a:spcAft>
+              <a:buSzPct val="100000"/>
+              <a:buChar char="•"/>
+            </a:pPr>
+            <a:r>
+              <a:rPr lang="en-US" sz="1200" dirty="0">
+                <a:solidFill>
+                  <a:srgbClr val="1A1A1A"/>
+                </a:solidFill>
+                <a:latin typeface="Georgia" pitchFamily="34" charset="0"/>
+                <a:ea typeface="Georgia" pitchFamily="34" charset="-122"/>
+                <a:cs typeface="Georgia" pitchFamily="34" charset="-120"/>
+              </a:rPr>
+              <a:t>Be honest about the </a:t>
+            </a:r>
+            <a:pPr algn="l" indent="0" marL="0">
+              <a:lnSpc>
+                <a:spcPts val="1620"/>
+              </a:lnSpc>
+              <a:spcAft>
+                <a:spcPts val="300"/>
+              </a:spcAft>
+              <a:buNone/>
+            </a:pPr>
+            <a:r>
+              <a:rPr lang="en-US" sz="1200" i="1" dirty="0">
+                <a:solidFill>
+                  <a:srgbClr val="1A1A1A"/>
+                </a:solidFill>
+                <a:latin typeface="Georgia" pitchFamily="34" charset="0"/>
+                <a:ea typeface="Georgia" pitchFamily="34" charset="-122"/>
+                <a:cs typeface="Georgia" pitchFamily="34" charset="-120"/>
+              </a:rPr>
+              <a:t>non-theistic</a:t>
+            </a:r>
+            <a:pPr algn="l" indent="0" marL="0">
+              <a:lnSpc>
+                <a:spcPts val="1620"/>
+              </a:lnSpc>
+              <a:spcAft>
+                <a:spcPts val="300"/>
+              </a:spcAft>
+              <a:buNone/>
+            </a:pPr>
+            <a:r>
+              <a:rPr lang="en-US" sz="1200" dirty="0">
+                <a:solidFill>
+                  <a:srgbClr val="1A1A1A"/>
+                </a:solidFill>
+                <a:latin typeface="Georgia" pitchFamily="34" charset="0"/>
+                <a:ea typeface="Georgia" pitchFamily="34" charset="-122"/>
+                <a:cs typeface="Georgia" pitchFamily="34" charset="-120"/>
+              </a:rPr>
+              <a:t> character of classical Sāṅkhya. It does NOT include a creator god as a tattva. The Yoga school (</a:t>
+            </a:r>
+            <a:pPr algn="l" indent="0" marL="0">
+              <a:lnSpc>
+                <a:spcPts val="1620"/>
+              </a:lnSpc>
+              <a:spcAft>
+                <a:spcPts val="300"/>
+              </a:spcAft>
+              <a:buNone/>
+            </a:pPr>
+            <a:r>
+              <a:rPr lang="en-US" sz="1200" i="1" dirty="0">
+                <a:solidFill>
+                  <a:srgbClr val="1A1A1A"/>
+                </a:solidFill>
+                <a:latin typeface="Georgia" pitchFamily="34" charset="0"/>
+                <a:ea typeface="Georgia" pitchFamily="34" charset="-122"/>
+                <a:cs typeface="Georgia" pitchFamily="34" charset="-120"/>
+              </a:rPr>
+              <a:t>Yoga Sūtras</a:t>
+            </a:r>
+            <a:pPr algn="l" indent="0" marL="0">
+              <a:lnSpc>
+                <a:spcPts val="1620"/>
+              </a:lnSpc>
+              <a:spcAft>
+                <a:spcPts val="300"/>
+              </a:spcAft>
+              <a:buNone/>
+            </a:pPr>
+            <a:r>
+              <a:rPr lang="en-US" sz="1200" dirty="0">
+                <a:solidFill>
+                  <a:srgbClr val="1A1A1A"/>
+                </a:solidFill>
+                <a:latin typeface="Georgia" pitchFamily="34" charset="0"/>
+                <a:ea typeface="Georgia" pitchFamily="34" charset="-122"/>
+                <a:cs typeface="Georgia" pitchFamily="34" charset="-120"/>
+              </a:rPr>
+              <a:t>) adds </a:t>
+            </a:r>
+            <a:pPr algn="l" indent="0" marL="0">
+              <a:lnSpc>
+                <a:spcPts val="1620"/>
+              </a:lnSpc>
+              <a:spcAft>
+                <a:spcPts val="300"/>
+              </a:spcAft>
+              <a:buNone/>
+            </a:pPr>
+            <a:r>
+              <a:rPr lang="en-US" sz="1200" i="1" dirty="0">
+                <a:solidFill>
+                  <a:srgbClr val="1A1A1A"/>
+                </a:solidFill>
+                <a:latin typeface="Georgia" pitchFamily="34" charset="0"/>
+                <a:ea typeface="Georgia" pitchFamily="34" charset="-122"/>
+                <a:cs typeface="Georgia" pitchFamily="34" charset="-120"/>
+              </a:rPr>
+              <a:t>Īśvara</a:t>
+            </a:r>
+            <a:pPr algn="l" indent="0" marL="0">
+              <a:lnSpc>
+                <a:spcPts val="1620"/>
+              </a:lnSpc>
+              <a:spcAft>
+                <a:spcPts val="300"/>
+              </a:spcAft>
+              <a:buNone/>
+            </a:pPr>
+            <a:r>
+              <a:rPr lang="en-US" sz="1200" dirty="0">
+                <a:solidFill>
+                  <a:srgbClr val="1A1A1A"/>
+                </a:solidFill>
+                <a:latin typeface="Georgia" pitchFamily="34" charset="0"/>
+                <a:ea typeface="Georgia" pitchFamily="34" charset="-122"/>
+                <a:cs typeface="Georgia" pitchFamily="34" charset="-120"/>
+              </a:rPr>
+              <a:t> as a separate principle; classical Sāṅkhya does not.</a:t>
+            </a:r>
+            <a:endParaRPr lang="en-US" sz="1200" dirty="0"/>
+          </a:p>
+        </p:txBody>
+      </p:sp>
+      <p:sp>
+        <p:nvSpPr>
+          <p:cNvPr id="5" name="Text 3"/>
+          <p:cNvSpPr/>
+          <p:nvPr/>
+        </p:nvSpPr>
+        <p:spPr>
+          <a:xfrm>
+            <a:off x="406301" y="4434929"/>
+            <a:ext cx="8498026" cy="213271"/>
+          </a:xfrm>
+          <a:prstGeom prst="rect">
+            <a:avLst/>
+          </a:prstGeom>
+          <a:noFill/>
+          <a:ln/>
+        </p:spPr>
+        <p:txBody>
+          <a:bodyPr wrap="square" lIns="0" tIns="0" rIns="0" bIns="0" rtlCol="0" anchor="t"/>
+          <a:lstStyle/>
+          <a:p>
+            <a:pPr algn="l" indent="0" marL="0">
+              <a:lnSpc>
+                <a:spcPts val="1680"/>
+              </a:lnSpc>
+              <a:spcBef>
+                <a:spcPts val="300"/>
+              </a:spcBef>
+              <a:spcAft>
+                <a:spcPts val="300"/>
+              </a:spcAft>
+              <a:buNone/>
+            </a:pPr>
+            <a:r>
+              <a:rPr lang="en-US" sz="1200" dirty="0">
+                <a:solidFill>
+                  <a:srgbClr val="1A1A1A"/>
+                </a:solidFill>
+                <a:latin typeface="Georgia" pitchFamily="34" charset="0"/>
+                <a:ea typeface="Georgia" pitchFamily="34" charset="-122"/>
+                <a:cs typeface="Georgia" pitchFamily="34" charset="-120"/>
+              </a:rPr>
+              <a:t>Senior ·  · IKS Curriculum</a:t>
+            </a:r>
+            <a:endParaRPr lang="en-US" sz="1200" dirty="0"/>
+          </a:p>
+        </p:txBody>
+      </p:sp>
+    </p:spTree>
+  </p:cSld>
+  <p:clrMapOvr>
+    <a:masterClrMapping/>
+  </p:clrMapOvr>
+</p:sld>
+</file>
+
+<file path=ppt/slides/slide14.xml><?xml version="1.0" encoding="utf-8"?>
+<p:sld xmlns:a="http://schemas.openxmlformats.org/drawingml/2006/main" xmlns:r="http://schemas.openxmlformats.org/officeDocument/2006/relationships" xmlns:p="http://schemas.openxmlformats.org/presentationml/2006/main">
+  <p:cSld name="Slide 14">
+    <p:bg>
+      <p:bgPr>
+        <a:solidFill>
+          <a:srgbClr val="FAF7F2"/>
+        </a:solidFill>
+      </p:bgPr>
+    </p:bg>
+    <p:spTree>
+      <p:nvGrpSpPr>
+        <p:cNvPr id="1" name=""/>
+        <p:cNvGrpSpPr/>
+        <p:nvPr/>
+      </p:nvGrpSpPr>
+      <p:grpSpPr>
+        <a:xfrm>
+          <a:off x="0" y="0"/>
+          <a:ext cx="0" cy="0"/>
+          <a:chOff x="0" y="0"/>
+          <a:chExt cx="0" cy="0"/>
+        </a:xfrm>
+      </p:grpSpPr>
+      <p:sp>
+        <p:nvSpPr>
+          <p:cNvPr id="2" name="Text 0"/>
+          <p:cNvSpPr/>
+          <p:nvPr/>
+        </p:nvSpPr>
+        <p:spPr>
+          <a:xfrm>
+            <a:off x="0" y="0"/>
+            <a:ext cx="9144000" cy="101501"/>
+          </a:xfrm>
+          <a:prstGeom prst="rect">
+            <a:avLst/>
+          </a:prstGeom>
+          <a:solidFill>
+            <a:srgbClr val="5D1D2E"/>
+          </a:solidFill>
+          <a:ln/>
+        </p:spPr>
+        <p:txBody>
+          <a:bodyPr wrap="square" rtlCol="0" anchor="ctr"/>
+          <a:lstStyle/>
+          <a:p>
+            <a:pPr indent="0" marL="0">
+              <a:buNone/>
+            </a:pPr>
+            <a:endParaRPr lang="en-US" dirty="0"/>
+          </a:p>
+        </p:txBody>
+      </p:sp>
+      <p:sp>
+        <p:nvSpPr>
+          <p:cNvPr id="3" name="Text 1"/>
+          <p:cNvSpPr/>
+          <p:nvPr/>
+        </p:nvSpPr>
+        <p:spPr>
+          <a:xfrm>
+            <a:off x="406301" y="457051"/>
+            <a:ext cx="8498026" cy="274290"/>
+          </a:xfrm>
+          <a:prstGeom prst="rect">
+            <a:avLst/>
+          </a:prstGeom>
+          <a:noFill/>
+          <a:ln/>
+        </p:spPr>
+        <p:txBody>
+          <a:bodyPr wrap="square" lIns="0" tIns="0" rIns="0" bIns="0" rtlCol="0" anchor="t"/>
+          <a:lstStyle/>
+          <a:p>
+            <a:pPr algn="l" indent="0" marL="0">
+              <a:lnSpc>
+                <a:spcPts val="2160"/>
+              </a:lnSpc>
+              <a:spcBef>
+                <a:spcPts val="600"/>
+              </a:spcBef>
+              <a:spcAft>
+                <a:spcPts val="800"/>
+              </a:spcAft>
+              <a:buNone/>
+            </a:pPr>
+            <a:r>
+              <a:rPr lang="en-US" sz="1800" b="1" dirty="0">
+                <a:solidFill>
+                  <a:srgbClr val="997929"/>
+                </a:solidFill>
+                <a:latin typeface="Times New Roman" pitchFamily="34" charset="0"/>
+                <a:ea typeface="Times New Roman" pitchFamily="34" charset="-122"/>
+                <a:cs typeface="Times New Roman" pitchFamily="34" charset="-120"/>
+              </a:rPr>
+              <a:t>Citation(s) used</a:t>
+            </a:r>
+            <a:endParaRPr lang="en-US" sz="1800" dirty="0"/>
+          </a:p>
+        </p:txBody>
+      </p:sp>
+      <p:sp>
+        <p:nvSpPr>
+          <p:cNvPr id="4" name="Text 2"/>
+          <p:cNvSpPr/>
+          <p:nvPr/>
+        </p:nvSpPr>
+        <p:spPr>
+          <a:xfrm>
+            <a:off x="634901" y="883593"/>
+            <a:ext cx="8102798" cy="544711"/>
+          </a:xfrm>
+          <a:prstGeom prst="rect">
+            <a:avLst/>
+          </a:prstGeom>
+          <a:noFill/>
+          <a:ln/>
+        </p:spPr>
+        <p:txBody>
+          <a:bodyPr wrap="square" lIns="0" tIns="0" rIns="0" bIns="0" rtlCol="0" anchor="t"/>
+          <a:lstStyle/>
+          <a:p>
+            <a:pPr algn="l" marL="342900" indent="-342900">
+              <a:lnSpc>
+                <a:spcPts val="1620"/>
+              </a:lnSpc>
+              <a:spcAft>
+                <a:spcPts val="300"/>
+              </a:spcAft>
+              <a:buSzPct val="100000"/>
+              <a:buChar char="•"/>
+            </a:pPr>
+            <a:r>
+              <a:rPr lang="en-US" sz="1200" dirty="0">
+                <a:solidFill>
+                  <a:srgbClr val="1A1A1A"/>
+                </a:solidFill>
+                <a:latin typeface="Georgia" pitchFamily="34" charset="0"/>
+                <a:ea typeface="Georgia" pitchFamily="34" charset="-122"/>
+                <a:cs typeface="Georgia" pitchFamily="34" charset="-120"/>
+              </a:rPr>
+              <a:t>SB 3.5.36 — vidya-karana RAG cache </a:t>
+            </a:r>
+            <a:pPr algn="l" indent="0" marL="0">
+              <a:lnSpc>
+                <a:spcPts val="1620"/>
+              </a:lnSpc>
+              <a:spcAft>
+                <a:spcPts val="300"/>
+              </a:spcAft>
+              <a:buNone/>
+            </a:pPr>
+            <a:r>
+              <a:rPr lang="en-US" sz="1200" dirty="0">
+                <a:solidFill>
+                  <a:srgbClr val="1A1A1A"/>
+                </a:solidFill>
+                <a:latin typeface="Georgia" pitchFamily="34" charset="0"/>
+                <a:ea typeface="Georgia" pitchFamily="34" charset="-122"/>
+                <a:cs typeface="Georgia" pitchFamily="34" charset="-120"/>
+              </a:rPr>
+              <a:t>day-02-creation.json#chunks[1]</a:t>
+            </a:r>
+            <a:endParaRPr lang="en-US" sz="1200" dirty="0"/>
+          </a:p>
+          <a:p>
+            <a:pPr algn="l" marL="342900" indent="-342900">
+              <a:lnSpc>
+                <a:spcPts val="1620"/>
+              </a:lnSpc>
+              <a:spcAft>
+                <a:spcPts val="300"/>
+              </a:spcAft>
+              <a:buSzPct val="100000"/>
+              <a:buChar char="•"/>
+            </a:pPr>
+            <a:r>
+              <a:rPr lang="en-US" sz="1200" dirty="0">
+                <a:solidFill>
+                  <a:srgbClr val="1A1A1A"/>
+                </a:solidFill>
+                <a:latin typeface="Georgia" pitchFamily="34" charset="0"/>
+                <a:ea typeface="Georgia" pitchFamily="34" charset="-122"/>
+                <a:cs typeface="Georgia" pitchFamily="34" charset="-120"/>
+              </a:rPr>
+              <a:t>Larson, </a:t>
+            </a:r>
+            <a:pPr algn="l" indent="0" marL="0">
+              <a:lnSpc>
+                <a:spcPts val="1620"/>
+              </a:lnSpc>
+              <a:spcAft>
+                <a:spcPts val="300"/>
+              </a:spcAft>
+              <a:buNone/>
+            </a:pPr>
+            <a:r>
+              <a:rPr lang="en-US" sz="1200" i="1" dirty="0">
+                <a:solidFill>
+                  <a:srgbClr val="1A1A1A"/>
+                </a:solidFill>
+                <a:latin typeface="Georgia" pitchFamily="34" charset="0"/>
+                <a:ea typeface="Georgia" pitchFamily="34" charset="-122"/>
+                <a:cs typeface="Georgia" pitchFamily="34" charset="-120"/>
+              </a:rPr>
               <a:t>Classical Sāṁkhya</a:t>
             </a:r>
             <a:pPr algn="l" indent="0" marL="0">
               <a:lnSpc>
-                <a:spcPts val="1680"/>
-              </a:lnSpc>
-              <a:spcBef>
-                <a:spcPts val="300"/>
-              </a:spcBef>
+                <a:spcPts val="1620"/>
+              </a:lnSpc>
               <a:spcAft>
                 <a:spcPts val="300"/>
               </a:spcAft>
@@ -2414,7 +3834,7 @@
                 <a:ea typeface="Times New Roman" pitchFamily="34" charset="-122"/>
                 <a:cs typeface="Times New Roman" pitchFamily="34" charset="-120"/>
               </a:rPr>
-              <a:t>Materials</a:t>
+              <a:t>Learning objective</a:t>
             </a:r>
             <a:endParaRPr lang="en-US" sz="1800" dirty="0"/>
           </a:p>
@@ -2429,7 +3849,7 @@
         <p:spPr>
           <a:xfrm>
             <a:off x="406301" y="870942"/>
-            <a:ext cx="8498026" cy="426541"/>
+            <a:ext cx="8498026" cy="213271"/>
           </a:xfrm>
           <a:prstGeom prst="rect">
             <a:avLst/>
@@ -2462,53 +3882,7 @@
                 <a:ea typeface="Georgia" pitchFamily="34" charset="-122"/>
                 <a:cs typeface="Georgia" pitchFamily="34" charset="-120"/>
               </a:rPr>
-              <a:t>– Large whiteboard or pinboard – A4 sheets for students – Sources excerpt: Larson's </a:t>
-            </a:r>
-            <a:pPr algn="l" indent="0" marL="0">
-              <a:lnSpc>
-                <a:spcPts val="1680"/>
-              </a:lnSpc>
-              <a:spcBef>
-                <a:spcPts val="300"/>
-              </a:spcBef>
-              <a:spcAft>
-                <a:spcPts val="300"/>
-              </a:spcAft>
-              <a:buNone/>
-            </a:pPr>
-            <a:r>
-              <a:rPr lang="en-US" sz="1200" i="1" dirty="0">
-                <a:solidFill>
-                  <a:srgbClr val="1A1A1A"/>
-                </a:solidFill>
-                <a:latin typeface="Georgia" pitchFamily="34" charset="0"/>
-                <a:ea typeface="Georgia" pitchFamily="34" charset="-122"/>
-                <a:cs typeface="Georgia" pitchFamily="34" charset="-120"/>
-              </a:rPr>
-              <a:t>Classical Sāṁkhya</a:t>
-            </a:r>
-            <a:pPr algn="l" indent="0" marL="0">
-              <a:lnSpc>
-                <a:spcPts val="1680"/>
-              </a:lnSpc>
-              <a:spcBef>
-                <a:spcPts val="300"/>
-              </a:spcBef>
-              <a:spcAft>
-                <a:spcPts val="300"/>
-              </a:spcAft>
-              <a:buNone/>
-            </a:pPr>
-            <a:r>
-              <a:rPr lang="en-US" sz="1200" dirty="0">
-                <a:solidFill>
-                  <a:srgbClr val="1A1A1A"/>
-                </a:solidFill>
-                <a:latin typeface="Georgia" pitchFamily="34" charset="0"/>
-                <a:ea typeface="Georgia" pitchFamily="34" charset="-122"/>
-                <a:cs typeface="Georgia" pitchFamily="34" charset="-120"/>
-              </a:rPr>
-              <a:t> summary (teacher-prepared, 1 page)</a:t>
+              <a:t>Students draw and label all 25 tattvas in the Sāṅkhya scheme, and locate the five bhūtas within the full enumeration.</a:t>
             </a:r>
             <a:endParaRPr lang="en-US" sz="1200" dirty="0"/>
           </a:p>
@@ -2666,7 +4040,7 @@
                 <a:ea typeface="Times New Roman" pitchFamily="34" charset="-122"/>
                 <a:cs typeface="Times New Roman" pitchFamily="34" charset="-120"/>
               </a:rPr>
-              <a:t>Flow</a:t>
+              <a:t>Materials</a:t>
             </a:r>
             <a:endParaRPr lang="en-US" sz="1800" dirty="0"/>
           </a:p>
@@ -2675,6 +4049,140 @@
       <p:sp>
         <p:nvSpPr>
           <p:cNvPr id="4" name="Text 2"/>
+          <p:cNvSpPr/>
+          <p:nvPr/>
+        </p:nvSpPr>
+        <p:spPr>
+          <a:xfrm>
+            <a:off x="634901" y="883593"/>
+            <a:ext cx="8102798" cy="769441"/>
+          </a:xfrm>
+          <a:prstGeom prst="rect">
+            <a:avLst/>
+          </a:prstGeom>
+          <a:noFill/>
+          <a:ln/>
+        </p:spPr>
+        <p:txBody>
+          <a:bodyPr wrap="square" lIns="0" tIns="0" rIns="0" bIns="0" rtlCol="0" anchor="t"/>
+          <a:lstStyle/>
+          <a:p>
+            <a:pPr algn="l" marL="342900" indent="-342900">
+              <a:lnSpc>
+                <a:spcPts val="1620"/>
+              </a:lnSpc>
+              <a:spcAft>
+                <a:spcPts val="300"/>
+              </a:spcAft>
+              <a:buSzPct val="100000"/>
+              <a:buChar char="•"/>
+            </a:pPr>
+            <a:r>
+              <a:rPr lang="en-US" sz="1200" dirty="0">
+                <a:solidFill>
+                  <a:srgbClr val="1A1A1A"/>
+                </a:solidFill>
+                <a:latin typeface="Georgia" pitchFamily="34" charset="0"/>
+                <a:ea typeface="Georgia" pitchFamily="34" charset="-122"/>
+                <a:cs typeface="Georgia" pitchFamily="34" charset="-120"/>
+              </a:rPr>
+              <a:t>Large whiteboard or pinboard</a:t>
+            </a:r>
+            <a:endParaRPr lang="en-US" sz="1200" dirty="0"/>
+          </a:p>
+          <a:p>
+            <a:pPr algn="l" marL="342900" indent="-342900">
+              <a:lnSpc>
+                <a:spcPts val="1620"/>
+              </a:lnSpc>
+              <a:spcAft>
+                <a:spcPts val="300"/>
+              </a:spcAft>
+              <a:buSzPct val="100000"/>
+              <a:buChar char="•"/>
+            </a:pPr>
+            <a:r>
+              <a:rPr lang="en-US" sz="1200" dirty="0">
+                <a:solidFill>
+                  <a:srgbClr val="1A1A1A"/>
+                </a:solidFill>
+                <a:latin typeface="Georgia" pitchFamily="34" charset="0"/>
+                <a:ea typeface="Georgia" pitchFamily="34" charset="-122"/>
+                <a:cs typeface="Georgia" pitchFamily="34" charset="-120"/>
+              </a:rPr>
+              <a:t>A4 sheets for students</a:t>
+            </a:r>
+            <a:endParaRPr lang="en-US" sz="1200" dirty="0"/>
+          </a:p>
+          <a:p>
+            <a:pPr algn="l" marL="342900" indent="-342900">
+              <a:lnSpc>
+                <a:spcPts val="1620"/>
+              </a:lnSpc>
+              <a:spcAft>
+                <a:spcPts val="300"/>
+              </a:spcAft>
+              <a:buSzPct val="100000"/>
+              <a:buChar char="•"/>
+            </a:pPr>
+            <a:r>
+              <a:rPr lang="en-US" sz="1200" dirty="0">
+                <a:solidFill>
+                  <a:srgbClr val="1A1A1A"/>
+                </a:solidFill>
+                <a:latin typeface="Georgia" pitchFamily="34" charset="0"/>
+                <a:ea typeface="Georgia" pitchFamily="34" charset="-122"/>
+                <a:cs typeface="Georgia" pitchFamily="34" charset="-120"/>
+              </a:rPr>
+              <a:t>Sources excerpt: Larson's </a:t>
+            </a:r>
+            <a:pPr algn="l" indent="0" marL="0">
+              <a:lnSpc>
+                <a:spcPts val="1620"/>
+              </a:lnSpc>
+              <a:spcAft>
+                <a:spcPts val="300"/>
+              </a:spcAft>
+              <a:buNone/>
+            </a:pPr>
+            <a:r>
+              <a:rPr lang="en-US" sz="1200" i="1" dirty="0">
+                <a:solidFill>
+                  <a:srgbClr val="1A1A1A"/>
+                </a:solidFill>
+                <a:latin typeface="Georgia" pitchFamily="34" charset="0"/>
+                <a:ea typeface="Georgia" pitchFamily="34" charset="-122"/>
+                <a:cs typeface="Georgia" pitchFamily="34" charset="-120"/>
+              </a:rPr>
+              <a:t>Classical Sāṁkhya</a:t>
+            </a:r>
+            <a:pPr algn="l" indent="0" marL="0">
+              <a:lnSpc>
+                <a:spcPts val="1620"/>
+              </a:lnSpc>
+              <a:spcAft>
+                <a:spcPts val="300"/>
+              </a:spcAft>
+              <a:buNone/>
+            </a:pPr>
+            <a:r>
+              <a:rPr lang="en-US" sz="1200" dirty="0">
+                <a:solidFill>
+                  <a:srgbClr val="1A1A1A"/>
+                </a:solidFill>
+                <a:latin typeface="Georgia" pitchFamily="34" charset="0"/>
+                <a:ea typeface="Georgia" pitchFamily="34" charset="-122"/>
+                <a:cs typeface="Georgia" pitchFamily="34" charset="-120"/>
+              </a:rPr>
+              <a:t> summary (teacher-prepared, 1 page)</a:t>
+            </a:r>
+            <a:endParaRPr lang="en-US" sz="1200" dirty="0"/>
+          </a:p>
+        </p:txBody>
+      </p:sp>
+      <p:sp>
+        <p:nvSpPr>
+          <p:cNvPr id="5" name="Text 3"/>
           <p:cNvSpPr/>
           <p:nvPr/>
         </p:nvSpPr>
@@ -2824,7 +4332,7 @@
                 <a:ea typeface="Times New Roman" pitchFamily="34" charset="-122"/>
                 <a:cs typeface="Times New Roman" pitchFamily="34" charset="-120"/>
               </a:rPr>
-              <a:t>Warm-up (5 min)</a:t>
+              <a:t>Flow</a:t>
             </a:r>
             <a:endParaRPr lang="en-US" sz="1800" dirty="0"/>
           </a:p>
@@ -2833,54 +4341,6 @@
       <p:sp>
         <p:nvSpPr>
           <p:cNvPr id="4" name="Text 2"/>
-          <p:cNvSpPr/>
-          <p:nvPr/>
-        </p:nvSpPr>
-        <p:spPr>
-          <a:xfrm>
-            <a:off x="406301" y="870942"/>
-            <a:ext cx="8498026" cy="426541"/>
-          </a:xfrm>
-          <a:prstGeom prst="rect">
-            <a:avLst/>
-          </a:prstGeom>
-          <a:noFill/>
-          <a:ln/>
-        </p:spPr>
-        <p:txBody>
-          <a:bodyPr wrap="square" lIns="0" tIns="0" rIns="0" bIns="0" rtlCol="0" anchor="t"/>
-          <a:lstStyle/>
-          <a:p>
-            <a:pPr algn="l" indent="0" marL="0">
-              <a:lnSpc>
-                <a:spcPts val="1680"/>
-              </a:lnSpc>
-              <a:spcBef>
-                <a:spcPts val="300"/>
-              </a:spcBef>
-              <a:spcAft>
-                <a:spcPts val="300"/>
-              </a:spcAft>
-              <a:buNone/>
-            </a:pPr>
-            <a:r>
-              <a:rPr lang="en-US" sz="1200" dirty="0">
-                <a:solidFill>
-                  <a:srgbClr val="1A1A1A"/>
-                </a:solidFill>
-                <a:latin typeface="Georgia" pitchFamily="34" charset="0"/>
-                <a:ea typeface="Georgia" pitchFamily="34" charset="-122"/>
-                <a:cs typeface="Georgia" pitchFamily="34" charset="-120"/>
-              </a:rPr>
-              <a:t>– 2 students share their homework question from Day 1. – Quick recap: "Five elements emerge LAST in Sāṅkhya. Today we see what comes first."</a:t>
-            </a:r>
-            <a:endParaRPr lang="en-US" sz="1200" dirty="0"/>
-          </a:p>
-        </p:txBody>
-      </p:sp>
-      <p:sp>
-        <p:nvSpPr>
-          <p:cNvPr id="5" name="Text 3"/>
           <p:cNvSpPr/>
           <p:nvPr/>
         </p:nvSpPr>
@@ -3030,7 +4490,7 @@
                 <a:ea typeface="Times New Roman" pitchFamily="34" charset="-122"/>
                 <a:cs typeface="Times New Roman" pitchFamily="34" charset="-120"/>
               </a:rPr>
-              <a:t>Core (25 min)</a:t>
+              <a:t>Warm-up (5 min)</a:t>
             </a:r>
             <a:endParaRPr lang="en-US" sz="1800" dirty="0"/>
           </a:p>
@@ -3045,7 +4505,7 @@
         <p:spPr>
           <a:xfrm>
             <a:off x="634901" y="883593"/>
-            <a:ext cx="8102798" cy="281880"/>
+            <a:ext cx="8102798" cy="525661"/>
           </a:xfrm>
           <a:prstGeom prst="rect">
             <a:avLst/>
@@ -3068,7 +4528,7 @@
               <a:buChar char="•"/>
             </a:pPr>
             <a:r>
-              <a:rPr lang="en-US" sz="1200" b="1" dirty="0">
+              <a:rPr lang="en-US" sz="1200" dirty="0">
                 <a:solidFill>
                   <a:srgbClr val="1A1A1A"/>
                 </a:solidFill>
@@ -3076,1192 +4536,23 @@
                 <a:ea typeface="Georgia" pitchFamily="34" charset="-122"/>
                 <a:cs typeface="Georgia" pitchFamily="34" charset="-120"/>
               </a:rPr>
-              <a:t>Build the ladder on the board, slowly:</a:t>
+              <a:t>2 students share their homework question from Day 1.</a:t>
             </a:r>
             <a:endParaRPr lang="en-US" sz="1200" dirty="0"/>
           </a:p>
-        </p:txBody>
-      </p:sp>
-      <p:sp>
-        <p:nvSpPr>
-          <p:cNvPr id="5" name="Text 3"/>
-          <p:cNvSpPr/>
-          <p:nvPr/>
-        </p:nvSpPr>
-        <p:spPr>
-          <a:xfrm>
-            <a:off x="406301" y="1266974"/>
-            <a:ext cx="8331398" cy="4967436"/>
-          </a:xfrm>
-          <a:prstGeom prst="rect">
-            <a:avLst/>
-          </a:prstGeom>
-          <a:solidFill>
-            <a:srgbClr val="FFFFFF"/>
-          </a:solidFill>
-          <a:ln/>
-        </p:spPr>
-        <p:txBody>
-          <a:bodyPr wrap="square" rtlCol="0" anchor="ctr"/>
-          <a:lstStyle/>
-          <a:p>
-            <a:pPr indent="0" marL="0">
-              <a:buNone/>
-            </a:pPr>
-            <a:endParaRPr lang="en-US" dirty="0"/>
-          </a:p>
-        </p:txBody>
-      </p:sp>
-      <p:sp>
-        <p:nvSpPr>
-          <p:cNvPr id="6" name="Shape 4"/>
-          <p:cNvSpPr/>
-          <p:nvPr/>
-        </p:nvSpPr>
-        <p:spPr>
-          <a:xfrm>
-            <a:off x="430113" y="1266974"/>
-            <a:ext cx="0" cy="4967436"/>
-          </a:xfrm>
-          <a:prstGeom prst="line">
-            <a:avLst/>
-          </a:prstGeom>
-          <a:noFill/>
-          <a:ln w="47625">
-            <a:solidFill>
-              <a:srgbClr val="5D1D2E"/>
-            </a:solidFill>
-            <a:prstDash val="solid"/>
-          </a:ln>
-        </p:spPr>
-      </p:sp>
-      <p:sp>
-        <p:nvSpPr>
-          <p:cNvPr id="7" name="Text 5"/>
-          <p:cNvSpPr/>
-          <p:nvPr/>
-        </p:nvSpPr>
-        <p:spPr>
-          <a:xfrm>
-            <a:off x="631627" y="1393924"/>
-            <a:ext cx="8086939" cy="174575"/>
-          </a:xfrm>
-          <a:prstGeom prst="rect">
-            <a:avLst/>
-          </a:prstGeom>
-          <a:noFill/>
-          <a:ln/>
-        </p:spPr>
-        <p:txBody>
-          <a:bodyPr wrap="square" lIns="0" tIns="0" rIns="0" bIns="0" rtlCol="0" anchor="t"/>
-          <a:lstStyle/>
-          <a:p>
-            <a:pPr algn="l" indent="0" marL="0">
-              <a:lnSpc>
-                <a:spcPts val="1375"/>
-              </a:lnSpc>
-              <a:buNone/>
-            </a:pPr>
-            <a:r>
-              <a:rPr lang="en-US" sz="1100" dirty="0">
-                <a:solidFill>
-                  <a:srgbClr val="1A1A1A"/>
-                </a:solidFill>
-                <a:latin typeface="Courier New" pitchFamily="34" charset="0"/>
-                <a:ea typeface="Courier New" pitchFamily="34" charset="-122"/>
-                <a:cs typeface="Courier New" pitchFamily="34" charset="-120"/>
-              </a:rPr>
-              <a:t>25. puruṣa (consciousness, the witness)</a:t>
-            </a:r>
-            <a:endParaRPr lang="en-US" sz="1100" dirty="0"/>
-          </a:p>
-        </p:txBody>
-      </p:sp>
-      <p:sp>
-        <p:nvSpPr>
-          <p:cNvPr id="8" name="Text 6"/>
-          <p:cNvSpPr/>
-          <p:nvPr/>
-        </p:nvSpPr>
-        <p:spPr>
-          <a:xfrm>
-            <a:off x="631627" y="1568500"/>
-            <a:ext cx="8086939" cy="174575"/>
-          </a:xfrm>
-          <a:prstGeom prst="rect">
-            <a:avLst/>
-          </a:prstGeom>
-          <a:noFill/>
-          <a:ln/>
-        </p:spPr>
-        <p:txBody>
-          <a:bodyPr wrap="square" lIns="0" tIns="0" rIns="0" bIns="0" rtlCol="0" anchor="t"/>
-          <a:lstStyle/>
-          <a:p>
-            <a:pPr algn="l" indent="0" marL="0">
-              <a:lnSpc>
-                <a:spcPts val="1375"/>
-              </a:lnSpc>
-              <a:buNone/>
-            </a:pPr>
-            <a:r>
-              <a:rPr lang="en-US" sz="1100" dirty="0">
-                <a:solidFill>
-                  <a:srgbClr val="1A1A1A"/>
-                </a:solidFill>
-                <a:latin typeface="Courier New" pitchFamily="34" charset="0"/>
-                <a:ea typeface="Courier New" pitchFamily="34" charset="-122"/>
-                <a:cs typeface="Courier New" pitchFamily="34" charset="-120"/>
-              </a:rPr>
-              <a:t>24. prakṛti (primordial nature, unmanifest)</a:t>
-            </a:r>
-            <a:endParaRPr lang="en-US" sz="1100" dirty="0"/>
-          </a:p>
-        </p:txBody>
-      </p:sp>
-      <p:sp>
-        <p:nvSpPr>
-          <p:cNvPr id="9" name="Text 7"/>
-          <p:cNvSpPr/>
-          <p:nvPr/>
-        </p:nvSpPr>
-        <p:spPr>
-          <a:xfrm>
-            <a:off x="631627" y="1743075"/>
-            <a:ext cx="8086939" cy="174575"/>
-          </a:xfrm>
-          <a:prstGeom prst="rect">
-            <a:avLst/>
-          </a:prstGeom>
-          <a:noFill/>
-          <a:ln/>
-        </p:spPr>
-        <p:txBody>
-          <a:bodyPr wrap="square" lIns="0" tIns="0" rIns="0" bIns="0" rtlCol="0" anchor="t"/>
-          <a:lstStyle/>
-          <a:p>
-            <a:pPr algn="l" indent="0" marL="0">
-              <a:lnSpc>
-                <a:spcPts val="1375"/>
-              </a:lnSpc>
-              <a:buNone/>
-            </a:pPr>
-            <a:r>
-              <a:rPr lang="en-US" sz="1100" dirty="0">
-                <a:solidFill>
-                  <a:srgbClr val="1A1A1A"/>
-                </a:solidFill>
-                <a:latin typeface="Courier New" pitchFamily="34" charset="0"/>
-                <a:ea typeface="Courier New" pitchFamily="34" charset="-122"/>
-                <a:cs typeface="Courier New" pitchFamily="34" charset="-120"/>
-              </a:rPr>
-              <a:t>___________________________ (evolution begins)</a:t>
-            </a:r>
-            <a:endParaRPr lang="en-US" sz="1100" dirty="0"/>
-          </a:p>
-        </p:txBody>
-      </p:sp>
-      <p:sp>
-        <p:nvSpPr>
-          <p:cNvPr id="10" name="Text 8"/>
-          <p:cNvSpPr/>
-          <p:nvPr/>
-        </p:nvSpPr>
-        <p:spPr>
-          <a:xfrm>
-            <a:off x="631627" y="1917650"/>
-            <a:ext cx="8086939" cy="174575"/>
-          </a:xfrm>
-          <a:prstGeom prst="rect">
-            <a:avLst/>
-          </a:prstGeom>
-          <a:noFill/>
-          <a:ln/>
-        </p:spPr>
-        <p:txBody>
-          <a:bodyPr wrap="square" lIns="0" tIns="0" rIns="0" bIns="0" rtlCol="0" anchor="t"/>
-          <a:lstStyle/>
-          <a:p>
-            <a:pPr algn="l" indent="0" marL="0">
-              <a:lnSpc>
-                <a:spcPts val="1375"/>
-              </a:lnSpc>
-              <a:buNone/>
-            </a:pPr>
-            <a:r>
-              <a:rPr lang="en-US" sz="1100" dirty="0">
-                <a:solidFill>
-                  <a:srgbClr val="1A1A1A"/>
-                </a:solidFill>
-                <a:latin typeface="Courier New" pitchFamily="34" charset="0"/>
-                <a:ea typeface="Courier New" pitchFamily="34" charset="-122"/>
-                <a:cs typeface="Courier New" pitchFamily="34" charset="-120"/>
-              </a:rPr>
-              <a:t>23. buddhi / mahat (intellect)</a:t>
-            </a:r>
-            <a:endParaRPr lang="en-US" sz="1100" dirty="0"/>
-          </a:p>
-        </p:txBody>
-      </p:sp>
-      <p:sp>
-        <p:nvSpPr>
-          <p:cNvPr id="11" name="Text 9"/>
-          <p:cNvSpPr/>
-          <p:nvPr/>
-        </p:nvSpPr>
-        <p:spPr>
-          <a:xfrm>
-            <a:off x="631627" y="2092226"/>
-            <a:ext cx="8086939" cy="174575"/>
-          </a:xfrm>
-          <a:prstGeom prst="rect">
-            <a:avLst/>
-          </a:prstGeom>
-          <a:noFill/>
-          <a:ln/>
-        </p:spPr>
-        <p:txBody>
-          <a:bodyPr wrap="square" lIns="0" tIns="0" rIns="0" bIns="0" rtlCol="0" anchor="t"/>
-          <a:lstStyle/>
-          <a:p>
-            <a:pPr algn="l" indent="0" marL="0">
-              <a:lnSpc>
-                <a:spcPts val="1375"/>
-              </a:lnSpc>
-              <a:buNone/>
-            </a:pPr>
-            <a:r>
-              <a:rPr lang="en-US" sz="1100" dirty="0">
-                <a:solidFill>
-                  <a:srgbClr val="1A1A1A"/>
-                </a:solidFill>
-                <a:latin typeface="Courier New" pitchFamily="34" charset="0"/>
-                <a:ea typeface="Courier New" pitchFamily="34" charset="-122"/>
-                <a:cs typeface="Courier New" pitchFamily="34" charset="-120"/>
-              </a:rPr>
-              <a:t>22. ahaṅkāra (ego, sense of "I")</a:t>
-            </a:r>
-            <a:endParaRPr lang="en-US" sz="1100" dirty="0"/>
-          </a:p>
-        </p:txBody>
-      </p:sp>
-      <p:sp>
-        <p:nvSpPr>
-          <p:cNvPr id="12" name="Text 10"/>
-          <p:cNvSpPr/>
-          <p:nvPr/>
-        </p:nvSpPr>
-        <p:spPr>
-          <a:xfrm>
-            <a:off x="631627" y="2266801"/>
-            <a:ext cx="8086939" cy="174575"/>
-          </a:xfrm>
-          <a:prstGeom prst="rect">
-            <a:avLst/>
-          </a:prstGeom>
-          <a:noFill/>
-          <a:ln/>
-        </p:spPr>
-        <p:txBody>
-          <a:bodyPr wrap="square" lIns="0" tIns="0" rIns="0" bIns="0" rtlCol="0" anchor="t"/>
-          <a:lstStyle/>
-          <a:p>
-            <a:pPr algn="l" indent="0" marL="0">
-              <a:lnSpc>
-                <a:spcPts val="1375"/>
-              </a:lnSpc>
-              <a:buNone/>
-            </a:pPr>
-            <a:r>
-              <a:rPr lang="en-US" sz="1100" dirty="0">
-                <a:solidFill>
-                  <a:srgbClr val="1A1A1A"/>
-                </a:solidFill>
-                <a:latin typeface="Courier New" pitchFamily="34" charset="0"/>
-                <a:ea typeface="Courier New" pitchFamily="34" charset="-122"/>
-                <a:cs typeface="Courier New" pitchFamily="34" charset="-120"/>
-              </a:rPr>
-              <a:t>___________________________ (branch into three lines)</a:t>
-            </a:r>
-            <a:endParaRPr lang="en-US" sz="1100" dirty="0"/>
-          </a:p>
-        </p:txBody>
-      </p:sp>
-      <p:sp>
-        <p:nvSpPr>
-          <p:cNvPr id="13" name="Text 11"/>
-          <p:cNvSpPr/>
-          <p:nvPr/>
-        </p:nvSpPr>
-        <p:spPr>
-          <a:xfrm>
-            <a:off x="631627" y="2615952"/>
-            <a:ext cx="8086939" cy="174575"/>
-          </a:xfrm>
-          <a:prstGeom prst="rect">
-            <a:avLst/>
-          </a:prstGeom>
-          <a:noFill/>
-          <a:ln/>
-        </p:spPr>
-        <p:txBody>
-          <a:bodyPr wrap="square" lIns="0" tIns="0" rIns="0" bIns="0" rtlCol="0" anchor="t"/>
-          <a:lstStyle/>
-          <a:p>
-            <a:pPr algn="l" indent="0" marL="0">
-              <a:lnSpc>
-                <a:spcPts val="1375"/>
-              </a:lnSpc>
-              <a:buNone/>
-            </a:pPr>
-            <a:r>
-              <a:rPr lang="en-US" sz="1100" dirty="0">
-                <a:solidFill>
-                  <a:srgbClr val="1A1A1A"/>
-                </a:solidFill>
-                <a:latin typeface="Courier New" pitchFamily="34" charset="0"/>
-                <a:ea typeface="Courier New" pitchFamily="34" charset="-122"/>
-                <a:cs typeface="Courier New" pitchFamily="34" charset="-120"/>
-              </a:rPr>
-              <a:t>Mental:                    Sense organs:           Action organs:</a:t>
-            </a:r>
-            <a:endParaRPr lang="en-US" sz="1100" dirty="0"/>
-          </a:p>
-        </p:txBody>
-      </p:sp>
-      <p:sp>
-        <p:nvSpPr>
-          <p:cNvPr id="14" name="Text 12"/>
-          <p:cNvSpPr/>
-          <p:nvPr/>
-        </p:nvSpPr>
-        <p:spPr>
-          <a:xfrm>
-            <a:off x="631627" y="2790527"/>
-            <a:ext cx="8086939" cy="174575"/>
-          </a:xfrm>
-          <a:prstGeom prst="rect">
-            <a:avLst/>
-          </a:prstGeom>
-          <a:noFill/>
-          <a:ln/>
-        </p:spPr>
-        <p:txBody>
-          <a:bodyPr wrap="square" lIns="0" tIns="0" rIns="0" bIns="0" rtlCol="0" anchor="t"/>
-          <a:lstStyle/>
-          <a:p>
-            <a:pPr algn="l" indent="0" marL="0">
-              <a:lnSpc>
-                <a:spcPts val="1375"/>
-              </a:lnSpc>
-              <a:buNone/>
-            </a:pPr>
-            <a:r>
-              <a:rPr lang="en-US" sz="1100" dirty="0">
-                <a:solidFill>
-                  <a:srgbClr val="1A1A1A"/>
-                </a:solidFill>
-                <a:latin typeface="Courier New" pitchFamily="34" charset="0"/>
-                <a:ea typeface="Courier New" pitchFamily="34" charset="-122"/>
-                <a:cs typeface="Courier New" pitchFamily="34" charset="-120"/>
-              </a:rPr>
-              <a:t>21. manas (mind)           20. śrotra (ear)        15. vāk (speech)</a:t>
-            </a:r>
-            <a:endParaRPr lang="en-US" sz="1100" dirty="0"/>
-          </a:p>
-        </p:txBody>
-      </p:sp>
-      <p:sp>
-        <p:nvSpPr>
-          <p:cNvPr id="15" name="Text 13"/>
-          <p:cNvSpPr/>
-          <p:nvPr/>
-        </p:nvSpPr>
-        <p:spPr>
-          <a:xfrm>
-            <a:off x="631627" y="2965103"/>
-            <a:ext cx="8086939" cy="174575"/>
-          </a:xfrm>
-          <a:prstGeom prst="rect">
-            <a:avLst/>
-          </a:prstGeom>
-          <a:noFill/>
-          <a:ln/>
-        </p:spPr>
-        <p:txBody>
-          <a:bodyPr wrap="square" lIns="0" tIns="0" rIns="0" bIns="0" rtlCol="0" anchor="t"/>
-          <a:lstStyle/>
-          <a:p>
-            <a:pPr algn="l" indent="0" marL="0">
-              <a:lnSpc>
-                <a:spcPts val="1375"/>
-              </a:lnSpc>
-              <a:buNone/>
-            </a:pPr>
-            <a:r>
-              <a:rPr lang="en-US" sz="1100" dirty="0">
-                <a:solidFill>
-                  <a:srgbClr val="1A1A1A"/>
-                </a:solidFill>
-                <a:latin typeface="Courier New" pitchFamily="34" charset="0"/>
-                <a:ea typeface="Courier New" pitchFamily="34" charset="-122"/>
-                <a:cs typeface="Courier New" pitchFamily="34" charset="-120"/>
-              </a:rPr>
-              <a:t>19. tvac (skin)         14. pāṇi (hand)</a:t>
-            </a:r>
-            <a:endParaRPr lang="en-US" sz="1100" dirty="0"/>
-          </a:p>
-        </p:txBody>
-      </p:sp>
-      <p:sp>
-        <p:nvSpPr>
-          <p:cNvPr id="16" name="Text 14"/>
-          <p:cNvSpPr/>
-          <p:nvPr/>
-        </p:nvSpPr>
-        <p:spPr>
-          <a:xfrm>
-            <a:off x="631627" y="3139678"/>
-            <a:ext cx="8086939" cy="174575"/>
-          </a:xfrm>
-          <a:prstGeom prst="rect">
-            <a:avLst/>
-          </a:prstGeom>
-          <a:noFill/>
-          <a:ln/>
-        </p:spPr>
-        <p:txBody>
-          <a:bodyPr wrap="square" lIns="0" tIns="0" rIns="0" bIns="0" rtlCol="0" anchor="t"/>
-          <a:lstStyle/>
-          <a:p>
-            <a:pPr algn="l" indent="0" marL="0">
-              <a:lnSpc>
-                <a:spcPts val="1375"/>
-              </a:lnSpc>
-              <a:buNone/>
-            </a:pPr>
-            <a:r>
-              <a:rPr lang="en-US" sz="1100" dirty="0">
-                <a:solidFill>
-                  <a:srgbClr val="1A1A1A"/>
-                </a:solidFill>
-                <a:latin typeface="Courier New" pitchFamily="34" charset="0"/>
-                <a:ea typeface="Courier New" pitchFamily="34" charset="-122"/>
-                <a:cs typeface="Courier New" pitchFamily="34" charset="-120"/>
-              </a:rPr>
-              <a:t>18. cakṣus (eye)        13. pāda (foot)</a:t>
-            </a:r>
-            <a:endParaRPr lang="en-US" sz="1100" dirty="0"/>
-          </a:p>
-        </p:txBody>
-      </p:sp>
-      <p:sp>
-        <p:nvSpPr>
-          <p:cNvPr id="17" name="Text 15"/>
-          <p:cNvSpPr/>
-          <p:nvPr/>
-        </p:nvSpPr>
-        <p:spPr>
-          <a:xfrm>
-            <a:off x="631627" y="3314254"/>
-            <a:ext cx="8086939" cy="174575"/>
-          </a:xfrm>
-          <a:prstGeom prst="rect">
-            <a:avLst/>
-          </a:prstGeom>
-          <a:noFill/>
-          <a:ln/>
-        </p:spPr>
-        <p:txBody>
-          <a:bodyPr wrap="square" lIns="0" tIns="0" rIns="0" bIns="0" rtlCol="0" anchor="t"/>
-          <a:lstStyle/>
-          <a:p>
-            <a:pPr algn="l" indent="0" marL="0">
-              <a:lnSpc>
-                <a:spcPts val="1375"/>
-              </a:lnSpc>
-              <a:buNone/>
-            </a:pPr>
-            <a:r>
-              <a:rPr lang="en-US" sz="1100" dirty="0">
-                <a:solidFill>
-                  <a:srgbClr val="1A1A1A"/>
-                </a:solidFill>
-                <a:latin typeface="Courier New" pitchFamily="34" charset="0"/>
-                <a:ea typeface="Courier New" pitchFamily="34" charset="-122"/>
-                <a:cs typeface="Courier New" pitchFamily="34" charset="-120"/>
-              </a:rPr>
-              <a:t>17. rasanā (tongue)     12. pāyu (anus)</a:t>
-            </a:r>
-            <a:endParaRPr lang="en-US" sz="1100" dirty="0"/>
-          </a:p>
-        </p:txBody>
-      </p:sp>
-      <p:sp>
-        <p:nvSpPr>
-          <p:cNvPr id="18" name="Text 16"/>
-          <p:cNvSpPr/>
-          <p:nvPr/>
-        </p:nvSpPr>
-        <p:spPr>
-          <a:xfrm>
-            <a:off x="631627" y="3488829"/>
-            <a:ext cx="8086939" cy="174575"/>
-          </a:xfrm>
-          <a:prstGeom prst="rect">
-            <a:avLst/>
-          </a:prstGeom>
-          <a:noFill/>
-          <a:ln/>
-        </p:spPr>
-        <p:txBody>
-          <a:bodyPr wrap="square" lIns="0" tIns="0" rIns="0" bIns="0" rtlCol="0" anchor="t"/>
-          <a:lstStyle/>
-          <a:p>
-            <a:pPr algn="l" indent="0" marL="0">
-              <a:lnSpc>
-                <a:spcPts val="1375"/>
-              </a:lnSpc>
-              <a:buNone/>
-            </a:pPr>
-            <a:r>
-              <a:rPr lang="en-US" sz="1100" dirty="0">
-                <a:solidFill>
-                  <a:srgbClr val="1A1A1A"/>
-                </a:solidFill>
-                <a:latin typeface="Courier New" pitchFamily="34" charset="0"/>
-                <a:ea typeface="Courier New" pitchFamily="34" charset="-122"/>
-                <a:cs typeface="Courier New" pitchFamily="34" charset="-120"/>
-              </a:rPr>
-              <a:t>16. ghrāṇa (nose)       11. upastha (genitals)</a:t>
-            </a:r>
-            <a:endParaRPr lang="en-US" sz="1100" dirty="0"/>
-          </a:p>
-        </p:txBody>
-      </p:sp>
-      <p:sp>
-        <p:nvSpPr>
-          <p:cNvPr id="19" name="Text 17"/>
-          <p:cNvSpPr/>
-          <p:nvPr/>
-        </p:nvSpPr>
-        <p:spPr>
-          <a:xfrm>
-            <a:off x="631627" y="3663404"/>
-            <a:ext cx="8086939" cy="174575"/>
-          </a:xfrm>
-          <a:prstGeom prst="rect">
-            <a:avLst/>
-          </a:prstGeom>
-          <a:noFill/>
-          <a:ln/>
-        </p:spPr>
-        <p:txBody>
-          <a:bodyPr wrap="square" lIns="0" tIns="0" rIns="0" bIns="0" rtlCol="0" anchor="t"/>
-          <a:lstStyle/>
-          <a:p>
-            <a:pPr algn="l" indent="0" marL="0">
-              <a:lnSpc>
-                <a:spcPts val="1375"/>
-              </a:lnSpc>
-              <a:buNone/>
-            </a:pPr>
-            <a:r>
-              <a:rPr lang="en-US" sz="1100" dirty="0">
-                <a:solidFill>
-                  <a:srgbClr val="1A1A1A"/>
-                </a:solidFill>
-                <a:latin typeface="Courier New" pitchFamily="34" charset="0"/>
-                <a:ea typeface="Courier New" pitchFamily="34" charset="-122"/>
-                <a:cs typeface="Courier New" pitchFamily="34" charset="-120"/>
-              </a:rPr>
-              <a:t>___________________________</a:t>
-            </a:r>
-            <a:endParaRPr lang="en-US" sz="1100" dirty="0"/>
-          </a:p>
-        </p:txBody>
-      </p:sp>
-      <p:sp>
-        <p:nvSpPr>
-          <p:cNvPr id="20" name="Text 18"/>
-          <p:cNvSpPr/>
-          <p:nvPr/>
-        </p:nvSpPr>
-        <p:spPr>
-          <a:xfrm>
-            <a:off x="631627" y="3837980"/>
-            <a:ext cx="8086939" cy="174575"/>
-          </a:xfrm>
-          <a:prstGeom prst="rect">
-            <a:avLst/>
-          </a:prstGeom>
-          <a:noFill/>
-          <a:ln/>
-        </p:spPr>
-        <p:txBody>
-          <a:bodyPr wrap="square" lIns="0" tIns="0" rIns="0" bIns="0" rtlCol="0" anchor="t"/>
-          <a:lstStyle/>
-          <a:p>
-            <a:pPr algn="l" indent="0" marL="0">
-              <a:lnSpc>
-                <a:spcPts val="1375"/>
-              </a:lnSpc>
-              <a:buNone/>
-            </a:pPr>
-            <a:r>
-              <a:rPr lang="en-US" sz="1100" dirty="0">
-                <a:solidFill>
-                  <a:srgbClr val="1A1A1A"/>
-                </a:solidFill>
-                <a:latin typeface="Courier New" pitchFamily="34" charset="0"/>
-                <a:ea typeface="Courier New" pitchFamily="34" charset="-122"/>
-                <a:cs typeface="Courier New" pitchFamily="34" charset="-120"/>
-              </a:rPr>
-              <a:t>Tanmātras (subtle elements, 10–6):</a:t>
-            </a:r>
-            <a:endParaRPr lang="en-US" sz="1100" dirty="0"/>
-          </a:p>
-        </p:txBody>
-      </p:sp>
-      <p:sp>
-        <p:nvSpPr>
-          <p:cNvPr id="21" name="Text 19"/>
-          <p:cNvSpPr/>
-          <p:nvPr/>
-        </p:nvSpPr>
-        <p:spPr>
-          <a:xfrm>
-            <a:off x="631627" y="4012555"/>
-            <a:ext cx="8086939" cy="174575"/>
-          </a:xfrm>
-          <a:prstGeom prst="rect">
-            <a:avLst/>
-          </a:prstGeom>
-          <a:noFill/>
-          <a:ln/>
-        </p:spPr>
-        <p:txBody>
-          <a:bodyPr wrap="square" lIns="0" tIns="0" rIns="0" bIns="0" rtlCol="0" anchor="t"/>
-          <a:lstStyle/>
-          <a:p>
-            <a:pPr algn="l" indent="0" marL="0">
-              <a:lnSpc>
-                <a:spcPts val="1375"/>
-              </a:lnSpc>
-              <a:buNone/>
-            </a:pPr>
-            <a:r>
-              <a:rPr lang="en-US" sz="1100" dirty="0">
-                <a:solidFill>
-                  <a:srgbClr val="1A1A1A"/>
-                </a:solidFill>
-                <a:latin typeface="Courier New" pitchFamily="34" charset="0"/>
-                <a:ea typeface="Courier New" pitchFamily="34" charset="-122"/>
-                <a:cs typeface="Courier New" pitchFamily="34" charset="-120"/>
-              </a:rPr>
-              <a:t>10. śabda-tanmātra (sound)</a:t>
-            </a:r>
-            <a:endParaRPr lang="en-US" sz="1100" dirty="0"/>
-          </a:p>
-        </p:txBody>
-      </p:sp>
-      <p:sp>
-        <p:nvSpPr>
-          <p:cNvPr id="22" name="Text 20"/>
-          <p:cNvSpPr/>
-          <p:nvPr/>
-        </p:nvSpPr>
-        <p:spPr>
-          <a:xfrm>
-            <a:off x="631627" y="4187130"/>
-            <a:ext cx="8086939" cy="174575"/>
-          </a:xfrm>
-          <a:prstGeom prst="rect">
-            <a:avLst/>
-          </a:prstGeom>
-          <a:noFill/>
-          <a:ln/>
-        </p:spPr>
-        <p:txBody>
-          <a:bodyPr wrap="square" lIns="0" tIns="0" rIns="0" bIns="0" rtlCol="0" anchor="t"/>
-          <a:lstStyle/>
-          <a:p>
-            <a:pPr algn="l" indent="0" marL="0">
-              <a:lnSpc>
-                <a:spcPts val="1375"/>
-              </a:lnSpc>
-              <a:buNone/>
-            </a:pPr>
-            <a:r>
-              <a:rPr lang="en-US" sz="1100" dirty="0">
-                <a:solidFill>
-                  <a:srgbClr val="1A1A1A"/>
-                </a:solidFill>
-                <a:latin typeface="Courier New" pitchFamily="34" charset="0"/>
-                <a:ea typeface="Courier New" pitchFamily="34" charset="-122"/>
-                <a:cs typeface="Courier New" pitchFamily="34" charset="-120"/>
-              </a:rPr>
-              <a:t>9. sparśa-tanmātra (touch)</a:t>
-            </a:r>
-            <a:endParaRPr lang="en-US" sz="1100" dirty="0"/>
-          </a:p>
-        </p:txBody>
-      </p:sp>
-      <p:sp>
-        <p:nvSpPr>
-          <p:cNvPr id="23" name="Text 21"/>
-          <p:cNvSpPr/>
-          <p:nvPr/>
-        </p:nvSpPr>
-        <p:spPr>
-          <a:xfrm>
-            <a:off x="631627" y="4361706"/>
-            <a:ext cx="8086939" cy="174575"/>
-          </a:xfrm>
-          <a:prstGeom prst="rect">
-            <a:avLst/>
-          </a:prstGeom>
-          <a:noFill/>
-          <a:ln/>
-        </p:spPr>
-        <p:txBody>
-          <a:bodyPr wrap="square" lIns="0" tIns="0" rIns="0" bIns="0" rtlCol="0" anchor="t"/>
-          <a:lstStyle/>
-          <a:p>
-            <a:pPr algn="l" indent="0" marL="0">
-              <a:lnSpc>
-                <a:spcPts val="1375"/>
-              </a:lnSpc>
-              <a:buNone/>
-            </a:pPr>
-            <a:r>
-              <a:rPr lang="en-US" sz="1100" dirty="0">
-                <a:solidFill>
-                  <a:srgbClr val="1A1A1A"/>
-                </a:solidFill>
-                <a:latin typeface="Courier New" pitchFamily="34" charset="0"/>
-                <a:ea typeface="Courier New" pitchFamily="34" charset="-122"/>
-                <a:cs typeface="Courier New" pitchFamily="34" charset="-120"/>
-              </a:rPr>
-              <a:t>8. rūpa-tanmātra (form)</a:t>
-            </a:r>
-            <a:endParaRPr lang="en-US" sz="1100" dirty="0"/>
-          </a:p>
-        </p:txBody>
-      </p:sp>
-      <p:sp>
-        <p:nvSpPr>
-          <p:cNvPr id="24" name="Text 22"/>
-          <p:cNvSpPr/>
-          <p:nvPr/>
-        </p:nvSpPr>
-        <p:spPr>
-          <a:xfrm>
-            <a:off x="631627" y="4536281"/>
-            <a:ext cx="8086939" cy="174575"/>
-          </a:xfrm>
-          <a:prstGeom prst="rect">
-            <a:avLst/>
-          </a:prstGeom>
-          <a:noFill/>
-          <a:ln/>
-        </p:spPr>
-        <p:txBody>
-          <a:bodyPr wrap="square" lIns="0" tIns="0" rIns="0" bIns="0" rtlCol="0" anchor="t"/>
-          <a:lstStyle/>
-          <a:p>
-            <a:pPr algn="l" indent="0" marL="0">
-              <a:lnSpc>
-                <a:spcPts val="1375"/>
-              </a:lnSpc>
-              <a:buNone/>
-            </a:pPr>
-            <a:r>
-              <a:rPr lang="en-US" sz="1100" dirty="0">
-                <a:solidFill>
-                  <a:srgbClr val="1A1A1A"/>
-                </a:solidFill>
-                <a:latin typeface="Courier New" pitchFamily="34" charset="0"/>
-                <a:ea typeface="Courier New" pitchFamily="34" charset="-122"/>
-                <a:cs typeface="Courier New" pitchFamily="34" charset="-120"/>
-              </a:rPr>
-              <a:t>7. rasa-tanmātra (taste)</a:t>
-            </a:r>
-            <a:endParaRPr lang="en-US" sz="1100" dirty="0"/>
-          </a:p>
-        </p:txBody>
-      </p:sp>
-      <p:sp>
-        <p:nvSpPr>
-          <p:cNvPr id="25" name="Text 23"/>
-          <p:cNvSpPr/>
-          <p:nvPr/>
-        </p:nvSpPr>
-        <p:spPr>
-          <a:xfrm>
-            <a:off x="631627" y="4710857"/>
-            <a:ext cx="8086939" cy="174575"/>
-          </a:xfrm>
-          <a:prstGeom prst="rect">
-            <a:avLst/>
-          </a:prstGeom>
-          <a:noFill/>
-          <a:ln/>
-        </p:spPr>
-        <p:txBody>
-          <a:bodyPr wrap="square" lIns="0" tIns="0" rIns="0" bIns="0" rtlCol="0" anchor="t"/>
-          <a:lstStyle/>
-          <a:p>
-            <a:pPr algn="l" indent="0" marL="0">
-              <a:lnSpc>
-                <a:spcPts val="1375"/>
-              </a:lnSpc>
-              <a:buNone/>
-            </a:pPr>
-            <a:r>
-              <a:rPr lang="en-US" sz="1100" dirty="0">
-                <a:solidFill>
-                  <a:srgbClr val="1A1A1A"/>
-                </a:solidFill>
-                <a:latin typeface="Courier New" pitchFamily="34" charset="0"/>
-                <a:ea typeface="Courier New" pitchFamily="34" charset="-122"/>
-                <a:cs typeface="Courier New" pitchFamily="34" charset="-120"/>
-              </a:rPr>
-              <a:t>6. gandha-tanmātra (smell)</a:t>
-            </a:r>
-            <a:endParaRPr lang="en-US" sz="1100" dirty="0"/>
-          </a:p>
-        </p:txBody>
-      </p:sp>
-      <p:sp>
-        <p:nvSpPr>
-          <p:cNvPr id="26" name="Text 24"/>
-          <p:cNvSpPr/>
-          <p:nvPr/>
-        </p:nvSpPr>
-        <p:spPr>
-          <a:xfrm>
-            <a:off x="631627" y="4885432"/>
-            <a:ext cx="8086939" cy="174575"/>
-          </a:xfrm>
-          <a:prstGeom prst="rect">
-            <a:avLst/>
-          </a:prstGeom>
-          <a:noFill/>
-          <a:ln/>
-        </p:spPr>
-        <p:txBody>
-          <a:bodyPr wrap="square" lIns="0" tIns="0" rIns="0" bIns="0" rtlCol="0" anchor="t"/>
-          <a:lstStyle/>
-          <a:p>
-            <a:pPr algn="l" indent="0" marL="0">
-              <a:lnSpc>
-                <a:spcPts val="1375"/>
-              </a:lnSpc>
-              <a:buNone/>
-            </a:pPr>
-            <a:r>
-              <a:rPr lang="en-US" sz="1100" dirty="0">
-                <a:solidFill>
-                  <a:srgbClr val="1A1A1A"/>
-                </a:solidFill>
-                <a:latin typeface="Courier New" pitchFamily="34" charset="0"/>
-                <a:ea typeface="Courier New" pitchFamily="34" charset="-122"/>
-                <a:cs typeface="Courier New" pitchFamily="34" charset="-120"/>
-              </a:rPr>
-              <a:t>___________________________</a:t>
-            </a:r>
-            <a:endParaRPr lang="en-US" sz="1100" dirty="0"/>
-          </a:p>
-        </p:txBody>
-      </p:sp>
-      <p:sp>
-        <p:nvSpPr>
-          <p:cNvPr id="27" name="Text 25"/>
-          <p:cNvSpPr/>
-          <p:nvPr/>
-        </p:nvSpPr>
-        <p:spPr>
-          <a:xfrm>
-            <a:off x="631627" y="5060007"/>
-            <a:ext cx="8086939" cy="174575"/>
-          </a:xfrm>
-          <a:prstGeom prst="rect">
-            <a:avLst/>
-          </a:prstGeom>
-          <a:noFill/>
-          <a:ln/>
-        </p:spPr>
-        <p:txBody>
-          <a:bodyPr wrap="square" lIns="0" tIns="0" rIns="0" bIns="0" rtlCol="0" anchor="t"/>
-          <a:lstStyle/>
-          <a:p>
-            <a:pPr algn="l" indent="0" marL="0">
-              <a:lnSpc>
-                <a:spcPts val="1375"/>
-              </a:lnSpc>
-              <a:buNone/>
-            </a:pPr>
-            <a:r>
-              <a:rPr lang="en-US" sz="1100" dirty="0">
-                <a:solidFill>
-                  <a:srgbClr val="1A1A1A"/>
-                </a:solidFill>
-                <a:latin typeface="Courier New" pitchFamily="34" charset="0"/>
-                <a:ea typeface="Courier New" pitchFamily="34" charset="-122"/>
-                <a:cs typeface="Courier New" pitchFamily="34" charset="-120"/>
-              </a:rPr>
-              <a:t>Mahābhūtas (gross elements, 5–1):</a:t>
-            </a:r>
-            <a:endParaRPr lang="en-US" sz="1100" dirty="0"/>
-          </a:p>
-        </p:txBody>
-      </p:sp>
-      <p:sp>
-        <p:nvSpPr>
-          <p:cNvPr id="28" name="Text 26"/>
-          <p:cNvSpPr/>
-          <p:nvPr/>
-        </p:nvSpPr>
-        <p:spPr>
-          <a:xfrm>
-            <a:off x="631627" y="5234583"/>
-            <a:ext cx="8086939" cy="174575"/>
-          </a:xfrm>
-          <a:prstGeom prst="rect">
-            <a:avLst/>
-          </a:prstGeom>
-          <a:noFill/>
-          <a:ln/>
-        </p:spPr>
-        <p:txBody>
-          <a:bodyPr wrap="square" lIns="0" tIns="0" rIns="0" bIns="0" rtlCol="0" anchor="t"/>
-          <a:lstStyle/>
-          <a:p>
-            <a:pPr algn="l" indent="0" marL="0">
-              <a:lnSpc>
-                <a:spcPts val="1375"/>
-              </a:lnSpc>
-              <a:buNone/>
-            </a:pPr>
-            <a:r>
-              <a:rPr lang="en-US" sz="1100" dirty="0">
-                <a:solidFill>
-                  <a:srgbClr val="1A1A1A"/>
-                </a:solidFill>
-                <a:latin typeface="Courier New" pitchFamily="34" charset="0"/>
-                <a:ea typeface="Courier New" pitchFamily="34" charset="-122"/>
-                <a:cs typeface="Courier New" pitchFamily="34" charset="-120"/>
-              </a:rPr>
-              <a:t>5. ākāśa (space)</a:t>
-            </a:r>
-            <a:endParaRPr lang="en-US" sz="1100" dirty="0"/>
-          </a:p>
-        </p:txBody>
-      </p:sp>
-      <p:sp>
-        <p:nvSpPr>
-          <p:cNvPr id="29" name="Text 27"/>
-          <p:cNvSpPr/>
-          <p:nvPr/>
-        </p:nvSpPr>
-        <p:spPr>
-          <a:xfrm>
-            <a:off x="631627" y="5409158"/>
-            <a:ext cx="8086939" cy="174575"/>
-          </a:xfrm>
-          <a:prstGeom prst="rect">
-            <a:avLst/>
-          </a:prstGeom>
-          <a:noFill/>
-          <a:ln/>
-        </p:spPr>
-        <p:txBody>
-          <a:bodyPr wrap="square" lIns="0" tIns="0" rIns="0" bIns="0" rtlCol="0" anchor="t"/>
-          <a:lstStyle/>
-          <a:p>
-            <a:pPr algn="l" indent="0" marL="0">
-              <a:lnSpc>
-                <a:spcPts val="1375"/>
-              </a:lnSpc>
-              <a:buNone/>
-            </a:pPr>
-            <a:r>
-              <a:rPr lang="en-US" sz="1100" dirty="0">
-                <a:solidFill>
-                  <a:srgbClr val="1A1A1A"/>
-                </a:solidFill>
-                <a:latin typeface="Courier New" pitchFamily="34" charset="0"/>
-                <a:ea typeface="Courier New" pitchFamily="34" charset="-122"/>
-                <a:cs typeface="Courier New" pitchFamily="34" charset="-120"/>
-              </a:rPr>
-              <a:t>4. vāyu (air)</a:t>
-            </a:r>
-            <a:endParaRPr lang="en-US" sz="1100" dirty="0"/>
-          </a:p>
-        </p:txBody>
-      </p:sp>
-      <p:sp>
-        <p:nvSpPr>
-          <p:cNvPr id="30" name="Text 28"/>
-          <p:cNvSpPr/>
-          <p:nvPr/>
-        </p:nvSpPr>
-        <p:spPr>
-          <a:xfrm>
-            <a:off x="631627" y="5583734"/>
-            <a:ext cx="8086939" cy="174575"/>
-          </a:xfrm>
-          <a:prstGeom prst="rect">
-            <a:avLst/>
-          </a:prstGeom>
-          <a:noFill/>
-          <a:ln/>
-        </p:spPr>
-        <p:txBody>
-          <a:bodyPr wrap="square" lIns="0" tIns="0" rIns="0" bIns="0" rtlCol="0" anchor="t"/>
-          <a:lstStyle/>
-          <a:p>
-            <a:pPr algn="l" indent="0" marL="0">
-              <a:lnSpc>
-                <a:spcPts val="1375"/>
-              </a:lnSpc>
-              <a:buNone/>
-            </a:pPr>
-            <a:r>
-              <a:rPr lang="en-US" sz="1100" dirty="0">
-                <a:solidFill>
-                  <a:srgbClr val="1A1A1A"/>
-                </a:solidFill>
-                <a:latin typeface="Courier New" pitchFamily="34" charset="0"/>
-                <a:ea typeface="Courier New" pitchFamily="34" charset="-122"/>
-                <a:cs typeface="Courier New" pitchFamily="34" charset="-120"/>
-              </a:rPr>
-              <a:t>3. tejas (fire)</a:t>
-            </a:r>
-            <a:endParaRPr lang="en-US" sz="1100" dirty="0"/>
-          </a:p>
-        </p:txBody>
-      </p:sp>
-      <p:sp>
-        <p:nvSpPr>
-          <p:cNvPr id="31" name="Text 29"/>
-          <p:cNvSpPr/>
-          <p:nvPr/>
-        </p:nvSpPr>
-        <p:spPr>
-          <a:xfrm>
-            <a:off x="631627" y="5758309"/>
-            <a:ext cx="8086939" cy="174575"/>
-          </a:xfrm>
-          <a:prstGeom prst="rect">
-            <a:avLst/>
-          </a:prstGeom>
-          <a:noFill/>
-          <a:ln/>
-        </p:spPr>
-        <p:txBody>
-          <a:bodyPr wrap="square" lIns="0" tIns="0" rIns="0" bIns="0" rtlCol="0" anchor="t"/>
-          <a:lstStyle/>
-          <a:p>
-            <a:pPr algn="l" indent="0" marL="0">
-              <a:lnSpc>
-                <a:spcPts val="1375"/>
-              </a:lnSpc>
-              <a:buNone/>
-            </a:pPr>
-            <a:r>
-              <a:rPr lang="en-US" sz="1100" dirty="0">
-                <a:solidFill>
-                  <a:srgbClr val="1A1A1A"/>
-                </a:solidFill>
-                <a:latin typeface="Courier New" pitchFamily="34" charset="0"/>
-                <a:ea typeface="Courier New" pitchFamily="34" charset="-122"/>
-                <a:cs typeface="Courier New" pitchFamily="34" charset="-120"/>
-              </a:rPr>
-              <a:t>2. ap (water)</a:t>
-            </a:r>
-            <a:endParaRPr lang="en-US" sz="1100" dirty="0"/>
-          </a:p>
-        </p:txBody>
-      </p:sp>
-      <p:sp>
-        <p:nvSpPr>
-          <p:cNvPr id="32" name="Text 30"/>
-          <p:cNvSpPr/>
-          <p:nvPr/>
-        </p:nvSpPr>
-        <p:spPr>
-          <a:xfrm>
-            <a:off x="631627" y="5932884"/>
-            <a:ext cx="8086939" cy="174575"/>
-          </a:xfrm>
-          <a:prstGeom prst="rect">
-            <a:avLst/>
-          </a:prstGeom>
-          <a:noFill/>
-          <a:ln/>
-        </p:spPr>
-        <p:txBody>
-          <a:bodyPr wrap="square" lIns="0" tIns="0" rIns="0" bIns="0" rtlCol="0" anchor="t"/>
-          <a:lstStyle/>
-          <a:p>
-            <a:pPr algn="l" indent="0" marL="0">
-              <a:lnSpc>
-                <a:spcPts val="1375"/>
-              </a:lnSpc>
-              <a:buNone/>
-            </a:pPr>
-            <a:r>
-              <a:rPr lang="en-US" sz="1100" dirty="0">
-                <a:solidFill>
-                  <a:srgbClr val="1A1A1A"/>
-                </a:solidFill>
-                <a:latin typeface="Courier New" pitchFamily="34" charset="0"/>
-                <a:ea typeface="Courier New" pitchFamily="34" charset="-122"/>
-                <a:cs typeface="Courier New" pitchFamily="34" charset="-120"/>
-              </a:rPr>
-              <a:t>1. pṛthvī (earth)</a:t>
-            </a:r>
-            <a:endParaRPr lang="en-US" sz="1100" dirty="0"/>
-          </a:p>
-        </p:txBody>
-      </p:sp>
-      <p:sp>
-        <p:nvSpPr>
-          <p:cNvPr id="33" name="Text 31"/>
-          <p:cNvSpPr/>
-          <p:nvPr/>
-        </p:nvSpPr>
-        <p:spPr>
-          <a:xfrm>
-            <a:off x="406301" y="6323261"/>
-            <a:ext cx="8498026" cy="426541"/>
-          </a:xfrm>
-          <a:prstGeom prst="rect">
-            <a:avLst/>
-          </a:prstGeom>
-          <a:noFill/>
-          <a:ln/>
-        </p:spPr>
-        <p:txBody>
-          <a:bodyPr wrap="square" lIns="0" tIns="0" rIns="0" bIns="0" rtlCol="0" anchor="t"/>
-          <a:lstStyle/>
-          <a:p>
-            <a:pPr algn="l" indent="0" marL="0">
-              <a:lnSpc>
-                <a:spcPts val="1680"/>
-              </a:lnSpc>
-              <a:spcBef>
-                <a:spcPts val="300"/>
-              </a:spcBef>
-              <a:spcAft>
-                <a:spcPts val="300"/>
-              </a:spcAft>
-              <a:buNone/>
-            </a:pPr>
-            <a:r>
-              <a:rPr lang="en-US" sz="1200" i="1" dirty="0">
+          <a:p>
+            <a:pPr algn="l" marL="342900" indent="-342900">
+              <a:lnSpc>
+                <a:spcPts val="1620"/>
+              </a:lnSpc>
+              <a:spcAft>
+                <a:spcPts val="300"/>
+              </a:spcAft>
+              <a:buSzPct val="100000"/>
+              <a:buChar char="•"/>
+            </a:pPr>
+            <a:r>
+              <a:rPr lang="en-US" sz="1200" dirty="0">
                 <a:solidFill>
                   <a:srgbClr val="1A1A1A"/>
                 </a:solidFill>
@@ -4269,7 +4560,7 @@
                 <a:ea typeface="Georgia" pitchFamily="34" charset="-122"/>
                 <a:cs typeface="Georgia" pitchFamily="34" charset="-120"/>
               </a:rPr>
-              <a:t>(Numbering convention varies in different Sāṅkhya texts; here we count from the most concrete (1 = earth) up to the most abstract (24 = prakṛti) with puruṣa as the silent 25th. Other texts count from puruṣa down.)</a:t>
+              <a:t>Quick recap: "Five elements emerge LAST in Sāṅkhya. Today we see what comes first."</a:t>
             </a:r>
             <a:endParaRPr lang="en-US" sz="1200" dirty="0"/>
           </a:p>
@@ -4277,199 +4568,13 @@
       </p:sp>
       <p:sp>
         <p:nvSpPr>
-          <p:cNvPr id="34" name="Text 32"/>
-          <p:cNvSpPr/>
-          <p:nvPr/>
-        </p:nvSpPr>
-        <p:spPr>
-          <a:xfrm>
-            <a:off x="634901" y="6838652"/>
-            <a:ext cx="8102798" cy="281880"/>
-          </a:xfrm>
-          <a:prstGeom prst="rect">
-            <a:avLst/>
-          </a:prstGeom>
-          <a:noFill/>
-          <a:ln/>
-        </p:spPr>
-        <p:txBody>
-          <a:bodyPr wrap="square" lIns="0" tIns="0" rIns="0" bIns="0" rtlCol="0" anchor="t"/>
-          <a:lstStyle/>
-          <a:p>
-            <a:pPr algn="l" marL="342900" indent="-342900">
-              <a:lnSpc>
-                <a:spcPts val="1620"/>
-              </a:lnSpc>
-              <a:spcAft>
-                <a:spcPts val="300"/>
-              </a:spcAft>
-              <a:buSzPct val="100000"/>
-              <a:buChar char="•"/>
-            </a:pPr>
-            <a:r>
-              <a:rPr lang="en-US" sz="1200" b="1" dirty="0">
-                <a:solidFill>
-                  <a:srgbClr val="1A1A1A"/>
-                </a:solidFill>
-                <a:latin typeface="Georgia" pitchFamily="34" charset="0"/>
-                <a:ea typeface="Georgia" pitchFamily="34" charset="-122"/>
-                <a:cs typeface="Georgia" pitchFamily="34" charset="-120"/>
-              </a:rPr>
-              <a:t>The key structural insight:</a:t>
-            </a:r>
-            <a:endParaRPr lang="en-US" sz="1200" dirty="0"/>
-          </a:p>
-        </p:txBody>
-      </p:sp>
-      <p:sp>
-        <p:nvSpPr>
-          <p:cNvPr id="35" name="Text 33"/>
-          <p:cNvSpPr/>
-          <p:nvPr/>
-        </p:nvSpPr>
-        <p:spPr>
-          <a:xfrm>
-            <a:off x="406301" y="7209383"/>
-            <a:ext cx="8498026" cy="639812"/>
-          </a:xfrm>
-          <a:prstGeom prst="rect">
-            <a:avLst/>
-          </a:prstGeom>
-          <a:noFill/>
-          <a:ln/>
-        </p:spPr>
-        <p:txBody>
-          <a:bodyPr wrap="square" lIns="0" tIns="0" rIns="0" bIns="0" rtlCol="0" anchor="t"/>
-          <a:lstStyle/>
-          <a:p>
-            <a:pPr algn="l" indent="0" marL="0">
-              <a:lnSpc>
-                <a:spcPts val="1680"/>
-              </a:lnSpc>
-              <a:spcBef>
-                <a:spcPts val="300"/>
-              </a:spcBef>
-              <a:spcAft>
-                <a:spcPts val="300"/>
-              </a:spcAft>
-              <a:buNone/>
-            </a:pPr>
-            <a:r>
-              <a:rPr lang="en-US" sz="1200" dirty="0">
-                <a:solidFill>
-                  <a:srgbClr val="1A1A1A"/>
-                </a:solidFill>
-                <a:latin typeface="Georgia" pitchFamily="34" charset="0"/>
-                <a:ea typeface="Georgia" pitchFamily="34" charset="-122"/>
-                <a:cs typeface="Georgia" pitchFamily="34" charset="-120"/>
-              </a:rPr>
-              <a:t>– The five gross elements (</a:t>
-            </a:r>
-            <a:pPr algn="l" indent="0" marL="0">
-              <a:lnSpc>
-                <a:spcPts val="1680"/>
-              </a:lnSpc>
-              <a:spcBef>
-                <a:spcPts val="300"/>
-              </a:spcBef>
-              <a:spcAft>
-                <a:spcPts val="300"/>
-              </a:spcAft>
-              <a:buNone/>
-            </a:pPr>
-            <a:r>
-              <a:rPr lang="en-US" sz="1200" i="1" dirty="0">
-                <a:solidFill>
-                  <a:srgbClr val="1A1A1A"/>
-                </a:solidFill>
-                <a:latin typeface="Georgia" pitchFamily="34" charset="0"/>
-                <a:ea typeface="Georgia" pitchFamily="34" charset="-122"/>
-                <a:cs typeface="Georgia" pitchFamily="34" charset="-120"/>
-              </a:rPr>
-              <a:t>mahābhūtas</a:t>
-            </a:r>
-            <a:pPr algn="l" indent="0" marL="0">
-              <a:lnSpc>
-                <a:spcPts val="1680"/>
-              </a:lnSpc>
-              <a:spcBef>
-                <a:spcPts val="300"/>
-              </a:spcBef>
-              <a:spcAft>
-                <a:spcPts val="300"/>
-              </a:spcAft>
-              <a:buNone/>
-            </a:pPr>
-            <a:r>
-              <a:rPr lang="en-US" sz="1200" dirty="0">
-                <a:solidFill>
-                  <a:srgbClr val="1A1A1A"/>
-                </a:solidFill>
-                <a:latin typeface="Georgia" pitchFamily="34" charset="0"/>
-                <a:ea typeface="Georgia" pitchFamily="34" charset="-122"/>
-                <a:cs typeface="Georgia" pitchFamily="34" charset="-120"/>
-              </a:rPr>
-              <a:t>) are the LAST and most concrete layer. – Each is paired with a </a:t>
-            </a:r>
-            <a:pPr algn="l" indent="0" marL="0">
-              <a:lnSpc>
-                <a:spcPts val="1680"/>
-              </a:lnSpc>
-              <a:spcBef>
-                <a:spcPts val="300"/>
-              </a:spcBef>
-              <a:spcAft>
-                <a:spcPts val="300"/>
-              </a:spcAft>
-              <a:buNone/>
-            </a:pPr>
-            <a:r>
-              <a:rPr lang="en-US" sz="1200" i="1" dirty="0">
-                <a:solidFill>
-                  <a:srgbClr val="1A1A1A"/>
-                </a:solidFill>
-                <a:latin typeface="Georgia" pitchFamily="34" charset="0"/>
-                <a:ea typeface="Georgia" pitchFamily="34" charset="-122"/>
-                <a:cs typeface="Georgia" pitchFamily="34" charset="-120"/>
-              </a:rPr>
-              <a:t>tanmātra</a:t>
-            </a:r>
-            <a:pPr algn="l" indent="0" marL="0">
-              <a:lnSpc>
-                <a:spcPts val="1680"/>
-              </a:lnSpc>
-              <a:spcBef>
-                <a:spcPts val="300"/>
-              </a:spcBef>
-              <a:spcAft>
-                <a:spcPts val="300"/>
-              </a:spcAft>
-              <a:buNone/>
-            </a:pPr>
-            <a:r>
-              <a:rPr lang="en-US" sz="1200" dirty="0">
-                <a:solidFill>
-                  <a:srgbClr val="1A1A1A"/>
-                </a:solidFill>
-                <a:latin typeface="Georgia" pitchFamily="34" charset="0"/>
-                <a:ea typeface="Georgia" pitchFamily="34" charset="-122"/>
-                <a:cs typeface="Georgia" pitchFamily="34" charset="-120"/>
-              </a:rPr>
-              <a:t> (subtle quality, the perceptual essence). – Each tanmātra is what the corresponding sense-organ perceives. – The whole scheme is internally consistent: the bhūtas, tanmātras, and indriyas line up in a tight one-to-one mapping.</a:t>
-            </a:r>
-            <a:endParaRPr lang="en-US" sz="1200" dirty="0"/>
-          </a:p>
-        </p:txBody>
-      </p:sp>
-      <p:sp>
-        <p:nvSpPr>
-          <p:cNvPr id="36" name="Text 34"/>
-          <p:cNvSpPr/>
-          <p:nvPr/>
-        </p:nvSpPr>
-        <p:spPr>
-          <a:xfrm>
-            <a:off x="406301" y="8001595"/>
+          <p:cNvPr id="5" name="Text 3"/>
+          <p:cNvSpPr/>
+          <p:nvPr/>
+        </p:nvSpPr>
+        <p:spPr>
+          <a:xfrm>
+            <a:off x="406301" y="4434929"/>
             <a:ext cx="8498026" cy="213271"/>
           </a:xfrm>
           <a:prstGeom prst="rect">
@@ -4613,7 +4718,7 @@
                 <a:ea typeface="Times New Roman" pitchFamily="34" charset="-122"/>
                 <a:cs typeface="Times New Roman" pitchFamily="34" charset="-120"/>
               </a:rPr>
-              <a:t>Diagram exercise (10 min)</a:t>
+              <a:t>Core (25 min)</a:t>
             </a:r>
             <a:endParaRPr lang="en-US" sz="1800" dirty="0"/>
           </a:p>
@@ -4627,8 +4732,8 @@
         </p:nvSpPr>
         <p:spPr>
           <a:xfrm>
-            <a:off x="406301" y="870942"/>
-            <a:ext cx="8498026" cy="213271"/>
+            <a:off x="634901" y="883593"/>
+            <a:ext cx="8102798" cy="281880"/>
           </a:xfrm>
           <a:prstGeom prst="rect">
             <a:avLst/>
@@ -4640,20 +4745,18 @@
           <a:bodyPr wrap="square" lIns="0" tIns="0" rIns="0" bIns="0" rtlCol="0" anchor="t"/>
           <a:lstStyle/>
           <a:p>
-            <a:pPr algn="l" indent="0" marL="0">
-              <a:lnSpc>
-                <a:spcPts val="1680"/>
-              </a:lnSpc>
-              <a:spcBef>
-                <a:spcPts val="300"/>
-              </a:spcBef>
-              <a:spcAft>
-                <a:spcPts val="300"/>
-              </a:spcAft>
-              <a:buNone/>
-            </a:pPr>
-            <a:r>
-              <a:rPr lang="en-US" sz="1200" dirty="0">
+            <a:pPr algn="l" marL="342900" indent="-342900">
+              <a:lnSpc>
+                <a:spcPts val="1620"/>
+              </a:lnSpc>
+              <a:spcAft>
+                <a:spcPts val="300"/>
+              </a:spcAft>
+              <a:buSzPct val="100000"/>
+              <a:buChar char="•"/>
+            </a:pPr>
+            <a:r>
+              <a:rPr lang="en-US" sz="1200" b="1" dirty="0">
                 <a:solidFill>
                   <a:srgbClr val="1A1A1A"/>
                 </a:solidFill>
@@ -4661,7 +4764,7 @@
                 <a:ea typeface="Georgia" pitchFamily="34" charset="-122"/>
                 <a:cs typeface="Georgia" pitchFamily="34" charset="-120"/>
               </a:rPr>
-              <a:t>Students draw the 25-tattva ladder in their notebooks. Use colour to mark the five bhūtas distinctly.</a:t>
+              <a:t>Build the ladder on the board, slowly:</a:t>
             </a:r>
             <a:endParaRPr lang="en-US" sz="1200" dirty="0"/>
           </a:p>
@@ -4819,7 +4922,7 @@
                 <a:ea typeface="Times New Roman" pitchFamily="34" charset="-122"/>
                 <a:cs typeface="Times New Roman" pitchFamily="34" charset="-120"/>
               </a:rPr>
-              <a:t>Wrap-up (5 min)</a:t>
+              <a:t>Core (25 min) (cont.)</a:t>
             </a:r>
             <a:endParaRPr lang="en-US" sz="1800" dirty="0"/>
           </a:p>
@@ -4833,13 +4936,66 @@
         </p:nvSpPr>
         <p:spPr>
           <a:xfrm>
-            <a:off x="406301" y="870942"/>
-            <a:ext cx="8498026" cy="426541"/>
-          </a:xfrm>
-          <a:prstGeom prst="rect">
+            <a:off x="406301" y="883593"/>
+            <a:ext cx="8331398" cy="4967436"/>
+          </a:xfrm>
+          <a:prstGeom prst="rect">
+            <a:avLst/>
+          </a:prstGeom>
+          <a:solidFill>
+            <a:srgbClr val="FFFFFF"/>
+          </a:solidFill>
+          <a:ln/>
+        </p:spPr>
+        <p:txBody>
+          <a:bodyPr wrap="square" rtlCol="0" anchor="ctr"/>
+          <a:lstStyle/>
+          <a:p>
+            <a:pPr indent="0" marL="0">
+              <a:buNone/>
+            </a:pPr>
+            <a:endParaRPr lang="en-US" dirty="0"/>
+          </a:p>
+        </p:txBody>
+      </p:sp>
+      <p:sp>
+        <p:nvSpPr>
+          <p:cNvPr id="5" name="Shape 3"/>
+          <p:cNvSpPr/>
+          <p:nvPr/>
+        </p:nvSpPr>
+        <p:spPr>
+          <a:xfrm>
+            <a:off x="430113" y="883593"/>
+            <a:ext cx="0" cy="4967436"/>
+          </a:xfrm>
+          <a:prstGeom prst="line">
             <a:avLst/>
           </a:prstGeom>
           <a:noFill/>
+          <a:ln w="47625">
+            <a:solidFill>
+              <a:srgbClr val="5D1D2E"/>
+            </a:solidFill>
+            <a:prstDash val="solid"/>
+          </a:ln>
+        </p:spPr>
+      </p:sp>
+      <p:sp>
+        <p:nvSpPr>
+          <p:cNvPr id="6" name="Text 4"/>
+          <p:cNvSpPr/>
+          <p:nvPr/>
+        </p:nvSpPr>
+        <p:spPr>
+          <a:xfrm>
+            <a:off x="631627" y="1010543"/>
+            <a:ext cx="8086939" cy="174575"/>
+          </a:xfrm>
+          <a:prstGeom prst="rect">
+            <a:avLst/>
+          </a:prstGeom>
+          <a:noFill/>
           <a:ln/>
         </p:spPr>
         <p:txBody>
@@ -4848,86 +5004,1084 @@
           <a:p>
             <a:pPr algn="l" indent="0" marL="0">
               <a:lnSpc>
-                <a:spcPts val="1680"/>
-              </a:lnSpc>
-              <a:spcBef>
-                <a:spcPts val="300"/>
-              </a:spcBef>
-              <a:spcAft>
-                <a:spcPts val="300"/>
-              </a:spcAft>
-              <a:buNone/>
-            </a:pPr>
-            <a:r>
-              <a:rPr lang="en-US" sz="1200" dirty="0">
-                <a:solidFill>
-                  <a:srgbClr val="1A1A1A"/>
-                </a:solidFill>
-                <a:latin typeface="Georgia" pitchFamily="34" charset="0"/>
-                <a:ea typeface="Georgia" pitchFamily="34" charset="-122"/>
-                <a:cs typeface="Georgia" pitchFamily="34" charset="-120"/>
-              </a:rPr>
-              <a:t>– Quick check: "Where do the five elements sit in the ladder?" (At the bottom — the most concrete, most manifest layer.) – Preview Day 3: "Tomorrow — the </a:t>
-            </a:r>
-            <a:pPr algn="l" indent="0" marL="0">
-              <a:lnSpc>
-                <a:spcPts val="1680"/>
-              </a:lnSpc>
-              <a:spcBef>
-                <a:spcPts val="300"/>
-              </a:spcBef>
-              <a:spcAft>
-                <a:spcPts val="300"/>
-              </a:spcAft>
-              <a:buNone/>
-            </a:pPr>
-            <a:r>
-              <a:rPr lang="en-US" sz="1200" i="1" dirty="0">
-                <a:solidFill>
-                  <a:srgbClr val="1A1A1A"/>
-                </a:solidFill>
-                <a:latin typeface="Georgia" pitchFamily="34" charset="0"/>
-                <a:ea typeface="Georgia" pitchFamily="34" charset="-122"/>
-                <a:cs typeface="Georgia" pitchFamily="34" charset="-120"/>
-              </a:rPr>
-              <a:t>bhūta-tanmātra</a:t>
-            </a:r>
-            <a:pPr algn="l" indent="0" marL="0">
-              <a:lnSpc>
-                <a:spcPts val="1680"/>
-              </a:lnSpc>
-              <a:spcBef>
-                <a:spcPts val="300"/>
-              </a:spcBef>
-              <a:spcAft>
-                <a:spcPts val="300"/>
-              </a:spcAft>
-              <a:buNone/>
-            </a:pPr>
-            <a:r>
-              <a:rPr lang="en-US" sz="1200" dirty="0">
-                <a:solidFill>
-                  <a:srgbClr val="1A1A1A"/>
-                </a:solidFill>
-                <a:latin typeface="Georgia" pitchFamily="34" charset="0"/>
-                <a:ea typeface="Georgia" pitchFamily="34" charset="-122"/>
-                <a:cs typeface="Georgia" pitchFamily="34" charset="-120"/>
-              </a:rPr>
-              <a:t> pairing in detail, and why the quality-count rule follows."</a:t>
-            </a:r>
-            <a:endParaRPr lang="en-US" sz="1200" dirty="0"/>
-          </a:p>
-        </p:txBody>
-      </p:sp>
-      <p:sp>
-        <p:nvSpPr>
-          <p:cNvPr id="5" name="Text 3"/>
-          <p:cNvSpPr/>
-          <p:nvPr/>
-        </p:nvSpPr>
-        <p:spPr>
-          <a:xfrm>
-            <a:off x="406301" y="4434929"/>
+                <a:spcPts val="1375"/>
+              </a:lnSpc>
+              <a:buNone/>
+            </a:pPr>
+            <a:r>
+              <a:rPr lang="en-US" sz="1100" dirty="0">
+                <a:solidFill>
+                  <a:srgbClr val="1A1A1A"/>
+                </a:solidFill>
+                <a:latin typeface="Courier New" pitchFamily="34" charset="0"/>
+                <a:ea typeface="Courier New" pitchFamily="34" charset="-122"/>
+                <a:cs typeface="Courier New" pitchFamily="34" charset="-120"/>
+              </a:rPr>
+              <a:t>25. puruṣa (consciousness, the witness)</a:t>
+            </a:r>
+            <a:endParaRPr lang="en-US" sz="1100" dirty="0"/>
+          </a:p>
+        </p:txBody>
+      </p:sp>
+      <p:sp>
+        <p:nvSpPr>
+          <p:cNvPr id="7" name="Text 5"/>
+          <p:cNvSpPr/>
+          <p:nvPr/>
+        </p:nvSpPr>
+        <p:spPr>
+          <a:xfrm>
+            <a:off x="631627" y="1185118"/>
+            <a:ext cx="8086939" cy="174575"/>
+          </a:xfrm>
+          <a:prstGeom prst="rect">
+            <a:avLst/>
+          </a:prstGeom>
+          <a:noFill/>
+          <a:ln/>
+        </p:spPr>
+        <p:txBody>
+          <a:bodyPr wrap="square" lIns="0" tIns="0" rIns="0" bIns="0" rtlCol="0" anchor="t"/>
+          <a:lstStyle/>
+          <a:p>
+            <a:pPr algn="l" indent="0" marL="0">
+              <a:lnSpc>
+                <a:spcPts val="1375"/>
+              </a:lnSpc>
+              <a:buNone/>
+            </a:pPr>
+            <a:r>
+              <a:rPr lang="en-US" sz="1100" dirty="0">
+                <a:solidFill>
+                  <a:srgbClr val="1A1A1A"/>
+                </a:solidFill>
+                <a:latin typeface="Courier New" pitchFamily="34" charset="0"/>
+                <a:ea typeface="Courier New" pitchFamily="34" charset="-122"/>
+                <a:cs typeface="Courier New" pitchFamily="34" charset="-120"/>
+              </a:rPr>
+              <a:t>24. prakṛti (primordial nature, unmanifest)</a:t>
+            </a:r>
+            <a:endParaRPr lang="en-US" sz="1100" dirty="0"/>
+          </a:p>
+        </p:txBody>
+      </p:sp>
+      <p:sp>
+        <p:nvSpPr>
+          <p:cNvPr id="8" name="Text 6"/>
+          <p:cNvSpPr/>
+          <p:nvPr/>
+        </p:nvSpPr>
+        <p:spPr>
+          <a:xfrm>
+            <a:off x="631627" y="1359694"/>
+            <a:ext cx="8086939" cy="174575"/>
+          </a:xfrm>
+          <a:prstGeom prst="rect">
+            <a:avLst/>
+          </a:prstGeom>
+          <a:noFill/>
+          <a:ln/>
+        </p:spPr>
+        <p:txBody>
+          <a:bodyPr wrap="square" lIns="0" tIns="0" rIns="0" bIns="0" rtlCol="0" anchor="t"/>
+          <a:lstStyle/>
+          <a:p>
+            <a:pPr algn="l" indent="0" marL="0">
+              <a:lnSpc>
+                <a:spcPts val="1375"/>
+              </a:lnSpc>
+              <a:buNone/>
+            </a:pPr>
+            <a:r>
+              <a:rPr lang="en-US" sz="1100" dirty="0">
+                <a:solidFill>
+                  <a:srgbClr val="1A1A1A"/>
+                </a:solidFill>
+                <a:latin typeface="Courier New" pitchFamily="34" charset="0"/>
+                <a:ea typeface="Courier New" pitchFamily="34" charset="-122"/>
+                <a:cs typeface="Courier New" pitchFamily="34" charset="-120"/>
+              </a:rPr>
+              <a:t>___________________________ (evolution begins)</a:t>
+            </a:r>
+            <a:endParaRPr lang="en-US" sz="1100" dirty="0"/>
+          </a:p>
+        </p:txBody>
+      </p:sp>
+      <p:sp>
+        <p:nvSpPr>
+          <p:cNvPr id="9" name="Text 7"/>
+          <p:cNvSpPr/>
+          <p:nvPr/>
+        </p:nvSpPr>
+        <p:spPr>
+          <a:xfrm>
+            <a:off x="631627" y="1534269"/>
+            <a:ext cx="8086939" cy="174575"/>
+          </a:xfrm>
+          <a:prstGeom prst="rect">
+            <a:avLst/>
+          </a:prstGeom>
+          <a:noFill/>
+          <a:ln/>
+        </p:spPr>
+        <p:txBody>
+          <a:bodyPr wrap="square" lIns="0" tIns="0" rIns="0" bIns="0" rtlCol="0" anchor="t"/>
+          <a:lstStyle/>
+          <a:p>
+            <a:pPr algn="l" indent="0" marL="0">
+              <a:lnSpc>
+                <a:spcPts val="1375"/>
+              </a:lnSpc>
+              <a:buNone/>
+            </a:pPr>
+            <a:r>
+              <a:rPr lang="en-US" sz="1100" dirty="0">
+                <a:solidFill>
+                  <a:srgbClr val="1A1A1A"/>
+                </a:solidFill>
+                <a:latin typeface="Courier New" pitchFamily="34" charset="0"/>
+                <a:ea typeface="Courier New" pitchFamily="34" charset="-122"/>
+                <a:cs typeface="Courier New" pitchFamily="34" charset="-120"/>
+              </a:rPr>
+              <a:t>23. buddhi / mahat (intellect)</a:t>
+            </a:r>
+            <a:endParaRPr lang="en-US" sz="1100" dirty="0"/>
+          </a:p>
+        </p:txBody>
+      </p:sp>
+      <p:sp>
+        <p:nvSpPr>
+          <p:cNvPr id="10" name="Text 8"/>
+          <p:cNvSpPr/>
+          <p:nvPr/>
+        </p:nvSpPr>
+        <p:spPr>
+          <a:xfrm>
+            <a:off x="631627" y="1708845"/>
+            <a:ext cx="8086939" cy="174575"/>
+          </a:xfrm>
+          <a:prstGeom prst="rect">
+            <a:avLst/>
+          </a:prstGeom>
+          <a:noFill/>
+          <a:ln/>
+        </p:spPr>
+        <p:txBody>
+          <a:bodyPr wrap="square" lIns="0" tIns="0" rIns="0" bIns="0" rtlCol="0" anchor="t"/>
+          <a:lstStyle/>
+          <a:p>
+            <a:pPr algn="l" indent="0" marL="0">
+              <a:lnSpc>
+                <a:spcPts val="1375"/>
+              </a:lnSpc>
+              <a:buNone/>
+            </a:pPr>
+            <a:r>
+              <a:rPr lang="en-US" sz="1100" dirty="0">
+                <a:solidFill>
+                  <a:srgbClr val="1A1A1A"/>
+                </a:solidFill>
+                <a:latin typeface="Courier New" pitchFamily="34" charset="0"/>
+                <a:ea typeface="Courier New" pitchFamily="34" charset="-122"/>
+                <a:cs typeface="Courier New" pitchFamily="34" charset="-120"/>
+              </a:rPr>
+              <a:t>22. ahaṅkāra (ego, sense of "I")</a:t>
+            </a:r>
+            <a:endParaRPr lang="en-US" sz="1100" dirty="0"/>
+          </a:p>
+        </p:txBody>
+      </p:sp>
+      <p:sp>
+        <p:nvSpPr>
+          <p:cNvPr id="11" name="Text 9"/>
+          <p:cNvSpPr/>
+          <p:nvPr/>
+        </p:nvSpPr>
+        <p:spPr>
+          <a:xfrm>
+            <a:off x="631627" y="1883420"/>
+            <a:ext cx="8086939" cy="174575"/>
+          </a:xfrm>
+          <a:prstGeom prst="rect">
+            <a:avLst/>
+          </a:prstGeom>
+          <a:noFill/>
+          <a:ln/>
+        </p:spPr>
+        <p:txBody>
+          <a:bodyPr wrap="square" lIns="0" tIns="0" rIns="0" bIns="0" rtlCol="0" anchor="t"/>
+          <a:lstStyle/>
+          <a:p>
+            <a:pPr algn="l" indent="0" marL="0">
+              <a:lnSpc>
+                <a:spcPts val="1375"/>
+              </a:lnSpc>
+              <a:buNone/>
+            </a:pPr>
+            <a:r>
+              <a:rPr lang="en-US" sz="1100" dirty="0">
+                <a:solidFill>
+                  <a:srgbClr val="1A1A1A"/>
+                </a:solidFill>
+                <a:latin typeface="Courier New" pitchFamily="34" charset="0"/>
+                <a:ea typeface="Courier New" pitchFamily="34" charset="-122"/>
+                <a:cs typeface="Courier New" pitchFamily="34" charset="-120"/>
+              </a:rPr>
+              <a:t>___________________________ (branch into three lines)</a:t>
+            </a:r>
+            <a:endParaRPr lang="en-US" sz="1100" dirty="0"/>
+          </a:p>
+        </p:txBody>
+      </p:sp>
+      <p:sp>
+        <p:nvSpPr>
+          <p:cNvPr id="12" name="Text 10"/>
+          <p:cNvSpPr/>
+          <p:nvPr/>
+        </p:nvSpPr>
+        <p:spPr>
+          <a:xfrm>
+            <a:off x="631627" y="2232571"/>
+            <a:ext cx="8086939" cy="174575"/>
+          </a:xfrm>
+          <a:prstGeom prst="rect">
+            <a:avLst/>
+          </a:prstGeom>
+          <a:noFill/>
+          <a:ln/>
+        </p:spPr>
+        <p:txBody>
+          <a:bodyPr wrap="square" lIns="0" tIns="0" rIns="0" bIns="0" rtlCol="0" anchor="t"/>
+          <a:lstStyle/>
+          <a:p>
+            <a:pPr algn="l" indent="0" marL="0">
+              <a:lnSpc>
+                <a:spcPts val="1375"/>
+              </a:lnSpc>
+              <a:buNone/>
+            </a:pPr>
+            <a:r>
+              <a:rPr lang="en-US" sz="1100" dirty="0">
+                <a:solidFill>
+                  <a:srgbClr val="1A1A1A"/>
+                </a:solidFill>
+                <a:latin typeface="Courier New" pitchFamily="34" charset="0"/>
+                <a:ea typeface="Courier New" pitchFamily="34" charset="-122"/>
+                <a:cs typeface="Courier New" pitchFamily="34" charset="-120"/>
+              </a:rPr>
+              <a:t>Mental:                    Sense organs:           Action organs:</a:t>
+            </a:r>
+            <a:endParaRPr lang="en-US" sz="1100" dirty="0"/>
+          </a:p>
+        </p:txBody>
+      </p:sp>
+      <p:sp>
+        <p:nvSpPr>
+          <p:cNvPr id="13" name="Text 11"/>
+          <p:cNvSpPr/>
+          <p:nvPr/>
+        </p:nvSpPr>
+        <p:spPr>
+          <a:xfrm>
+            <a:off x="631627" y="2407146"/>
+            <a:ext cx="8086939" cy="174575"/>
+          </a:xfrm>
+          <a:prstGeom prst="rect">
+            <a:avLst/>
+          </a:prstGeom>
+          <a:noFill/>
+          <a:ln/>
+        </p:spPr>
+        <p:txBody>
+          <a:bodyPr wrap="square" lIns="0" tIns="0" rIns="0" bIns="0" rtlCol="0" anchor="t"/>
+          <a:lstStyle/>
+          <a:p>
+            <a:pPr algn="l" indent="0" marL="0">
+              <a:lnSpc>
+                <a:spcPts val="1375"/>
+              </a:lnSpc>
+              <a:buNone/>
+            </a:pPr>
+            <a:r>
+              <a:rPr lang="en-US" sz="1100" dirty="0">
+                <a:solidFill>
+                  <a:srgbClr val="1A1A1A"/>
+                </a:solidFill>
+                <a:latin typeface="Courier New" pitchFamily="34" charset="0"/>
+                <a:ea typeface="Courier New" pitchFamily="34" charset="-122"/>
+                <a:cs typeface="Courier New" pitchFamily="34" charset="-120"/>
+              </a:rPr>
+              <a:t>21. manas (mind)           20. śrotra (ear)        15. vāk (speech)</a:t>
+            </a:r>
+            <a:endParaRPr lang="en-US" sz="1100" dirty="0"/>
+          </a:p>
+        </p:txBody>
+      </p:sp>
+      <p:sp>
+        <p:nvSpPr>
+          <p:cNvPr id="14" name="Text 12"/>
+          <p:cNvSpPr/>
+          <p:nvPr/>
+        </p:nvSpPr>
+        <p:spPr>
+          <a:xfrm>
+            <a:off x="631627" y="2581721"/>
+            <a:ext cx="8086939" cy="174575"/>
+          </a:xfrm>
+          <a:prstGeom prst="rect">
+            <a:avLst/>
+          </a:prstGeom>
+          <a:noFill/>
+          <a:ln/>
+        </p:spPr>
+        <p:txBody>
+          <a:bodyPr wrap="square" lIns="0" tIns="0" rIns="0" bIns="0" rtlCol="0" anchor="t"/>
+          <a:lstStyle/>
+          <a:p>
+            <a:pPr algn="l" indent="0" marL="0">
+              <a:lnSpc>
+                <a:spcPts val="1375"/>
+              </a:lnSpc>
+              <a:buNone/>
+            </a:pPr>
+            <a:r>
+              <a:rPr lang="en-US" sz="1100" dirty="0">
+                <a:solidFill>
+                  <a:srgbClr val="1A1A1A"/>
+                </a:solidFill>
+                <a:latin typeface="Courier New" pitchFamily="34" charset="0"/>
+                <a:ea typeface="Courier New" pitchFamily="34" charset="-122"/>
+                <a:cs typeface="Courier New" pitchFamily="34" charset="-120"/>
+              </a:rPr>
+              <a:t>19. tvac (skin)         14. pāṇi (hand)</a:t>
+            </a:r>
+            <a:endParaRPr lang="en-US" sz="1100" dirty="0"/>
+          </a:p>
+        </p:txBody>
+      </p:sp>
+      <p:sp>
+        <p:nvSpPr>
+          <p:cNvPr id="15" name="Text 13"/>
+          <p:cNvSpPr/>
+          <p:nvPr/>
+        </p:nvSpPr>
+        <p:spPr>
+          <a:xfrm>
+            <a:off x="631627" y="2756297"/>
+            <a:ext cx="8086939" cy="174575"/>
+          </a:xfrm>
+          <a:prstGeom prst="rect">
+            <a:avLst/>
+          </a:prstGeom>
+          <a:noFill/>
+          <a:ln/>
+        </p:spPr>
+        <p:txBody>
+          <a:bodyPr wrap="square" lIns="0" tIns="0" rIns="0" bIns="0" rtlCol="0" anchor="t"/>
+          <a:lstStyle/>
+          <a:p>
+            <a:pPr algn="l" indent="0" marL="0">
+              <a:lnSpc>
+                <a:spcPts val="1375"/>
+              </a:lnSpc>
+              <a:buNone/>
+            </a:pPr>
+            <a:r>
+              <a:rPr lang="en-US" sz="1100" dirty="0">
+                <a:solidFill>
+                  <a:srgbClr val="1A1A1A"/>
+                </a:solidFill>
+                <a:latin typeface="Courier New" pitchFamily="34" charset="0"/>
+                <a:ea typeface="Courier New" pitchFamily="34" charset="-122"/>
+                <a:cs typeface="Courier New" pitchFamily="34" charset="-120"/>
+              </a:rPr>
+              <a:t>18. cakṣus (eye)        13. pāda (foot)</a:t>
+            </a:r>
+            <a:endParaRPr lang="en-US" sz="1100" dirty="0"/>
+          </a:p>
+        </p:txBody>
+      </p:sp>
+      <p:sp>
+        <p:nvSpPr>
+          <p:cNvPr id="16" name="Text 14"/>
+          <p:cNvSpPr/>
+          <p:nvPr/>
+        </p:nvSpPr>
+        <p:spPr>
+          <a:xfrm>
+            <a:off x="631627" y="2930872"/>
+            <a:ext cx="8086939" cy="174575"/>
+          </a:xfrm>
+          <a:prstGeom prst="rect">
+            <a:avLst/>
+          </a:prstGeom>
+          <a:noFill/>
+          <a:ln/>
+        </p:spPr>
+        <p:txBody>
+          <a:bodyPr wrap="square" lIns="0" tIns="0" rIns="0" bIns="0" rtlCol="0" anchor="t"/>
+          <a:lstStyle/>
+          <a:p>
+            <a:pPr algn="l" indent="0" marL="0">
+              <a:lnSpc>
+                <a:spcPts val="1375"/>
+              </a:lnSpc>
+              <a:buNone/>
+            </a:pPr>
+            <a:r>
+              <a:rPr lang="en-US" sz="1100" dirty="0">
+                <a:solidFill>
+                  <a:srgbClr val="1A1A1A"/>
+                </a:solidFill>
+                <a:latin typeface="Courier New" pitchFamily="34" charset="0"/>
+                <a:ea typeface="Courier New" pitchFamily="34" charset="-122"/>
+                <a:cs typeface="Courier New" pitchFamily="34" charset="-120"/>
+              </a:rPr>
+              <a:t>17. rasanā (tongue)     12. pāyu (anus)</a:t>
+            </a:r>
+            <a:endParaRPr lang="en-US" sz="1100" dirty="0"/>
+          </a:p>
+        </p:txBody>
+      </p:sp>
+      <p:sp>
+        <p:nvSpPr>
+          <p:cNvPr id="17" name="Text 15"/>
+          <p:cNvSpPr/>
+          <p:nvPr/>
+        </p:nvSpPr>
+        <p:spPr>
+          <a:xfrm>
+            <a:off x="631627" y="3105448"/>
+            <a:ext cx="8086939" cy="174575"/>
+          </a:xfrm>
+          <a:prstGeom prst="rect">
+            <a:avLst/>
+          </a:prstGeom>
+          <a:noFill/>
+          <a:ln/>
+        </p:spPr>
+        <p:txBody>
+          <a:bodyPr wrap="square" lIns="0" tIns="0" rIns="0" bIns="0" rtlCol="0" anchor="t"/>
+          <a:lstStyle/>
+          <a:p>
+            <a:pPr algn="l" indent="0" marL="0">
+              <a:lnSpc>
+                <a:spcPts val="1375"/>
+              </a:lnSpc>
+              <a:buNone/>
+            </a:pPr>
+            <a:r>
+              <a:rPr lang="en-US" sz="1100" dirty="0">
+                <a:solidFill>
+                  <a:srgbClr val="1A1A1A"/>
+                </a:solidFill>
+                <a:latin typeface="Courier New" pitchFamily="34" charset="0"/>
+                <a:ea typeface="Courier New" pitchFamily="34" charset="-122"/>
+                <a:cs typeface="Courier New" pitchFamily="34" charset="-120"/>
+              </a:rPr>
+              <a:t>16. ghrāṇa (nose)       11. upastha (genitals)</a:t>
+            </a:r>
+            <a:endParaRPr lang="en-US" sz="1100" dirty="0"/>
+          </a:p>
+        </p:txBody>
+      </p:sp>
+      <p:sp>
+        <p:nvSpPr>
+          <p:cNvPr id="18" name="Text 16"/>
+          <p:cNvSpPr/>
+          <p:nvPr/>
+        </p:nvSpPr>
+        <p:spPr>
+          <a:xfrm>
+            <a:off x="631627" y="3280023"/>
+            <a:ext cx="8086939" cy="174575"/>
+          </a:xfrm>
+          <a:prstGeom prst="rect">
+            <a:avLst/>
+          </a:prstGeom>
+          <a:noFill/>
+          <a:ln/>
+        </p:spPr>
+        <p:txBody>
+          <a:bodyPr wrap="square" lIns="0" tIns="0" rIns="0" bIns="0" rtlCol="0" anchor="t"/>
+          <a:lstStyle/>
+          <a:p>
+            <a:pPr algn="l" indent="0" marL="0">
+              <a:lnSpc>
+                <a:spcPts val="1375"/>
+              </a:lnSpc>
+              <a:buNone/>
+            </a:pPr>
+            <a:r>
+              <a:rPr lang="en-US" sz="1100" dirty="0">
+                <a:solidFill>
+                  <a:srgbClr val="1A1A1A"/>
+                </a:solidFill>
+                <a:latin typeface="Courier New" pitchFamily="34" charset="0"/>
+                <a:ea typeface="Courier New" pitchFamily="34" charset="-122"/>
+                <a:cs typeface="Courier New" pitchFamily="34" charset="-120"/>
+              </a:rPr>
+              <a:t>___________________________</a:t>
+            </a:r>
+            <a:endParaRPr lang="en-US" sz="1100" dirty="0"/>
+          </a:p>
+        </p:txBody>
+      </p:sp>
+      <p:sp>
+        <p:nvSpPr>
+          <p:cNvPr id="19" name="Text 17"/>
+          <p:cNvSpPr/>
+          <p:nvPr/>
+        </p:nvSpPr>
+        <p:spPr>
+          <a:xfrm>
+            <a:off x="631627" y="3454598"/>
+            <a:ext cx="8086939" cy="174575"/>
+          </a:xfrm>
+          <a:prstGeom prst="rect">
+            <a:avLst/>
+          </a:prstGeom>
+          <a:noFill/>
+          <a:ln/>
+        </p:spPr>
+        <p:txBody>
+          <a:bodyPr wrap="square" lIns="0" tIns="0" rIns="0" bIns="0" rtlCol="0" anchor="t"/>
+          <a:lstStyle/>
+          <a:p>
+            <a:pPr algn="l" indent="0" marL="0">
+              <a:lnSpc>
+                <a:spcPts val="1375"/>
+              </a:lnSpc>
+              <a:buNone/>
+            </a:pPr>
+            <a:r>
+              <a:rPr lang="en-US" sz="1100" dirty="0">
+                <a:solidFill>
+                  <a:srgbClr val="1A1A1A"/>
+                </a:solidFill>
+                <a:latin typeface="Courier New" pitchFamily="34" charset="0"/>
+                <a:ea typeface="Courier New" pitchFamily="34" charset="-122"/>
+                <a:cs typeface="Courier New" pitchFamily="34" charset="-120"/>
+              </a:rPr>
+              <a:t>Tanmātras (subtle elements, 10–6):</a:t>
+            </a:r>
+            <a:endParaRPr lang="en-US" sz="1100" dirty="0"/>
+          </a:p>
+        </p:txBody>
+      </p:sp>
+      <p:sp>
+        <p:nvSpPr>
+          <p:cNvPr id="20" name="Text 18"/>
+          <p:cNvSpPr/>
+          <p:nvPr/>
+        </p:nvSpPr>
+        <p:spPr>
+          <a:xfrm>
+            <a:off x="631627" y="3629174"/>
+            <a:ext cx="8086939" cy="174575"/>
+          </a:xfrm>
+          <a:prstGeom prst="rect">
+            <a:avLst/>
+          </a:prstGeom>
+          <a:noFill/>
+          <a:ln/>
+        </p:spPr>
+        <p:txBody>
+          <a:bodyPr wrap="square" lIns="0" tIns="0" rIns="0" bIns="0" rtlCol="0" anchor="t"/>
+          <a:lstStyle/>
+          <a:p>
+            <a:pPr algn="l" indent="0" marL="0">
+              <a:lnSpc>
+                <a:spcPts val="1375"/>
+              </a:lnSpc>
+              <a:buNone/>
+            </a:pPr>
+            <a:r>
+              <a:rPr lang="en-US" sz="1100" dirty="0">
+                <a:solidFill>
+                  <a:srgbClr val="1A1A1A"/>
+                </a:solidFill>
+                <a:latin typeface="Courier New" pitchFamily="34" charset="0"/>
+                <a:ea typeface="Courier New" pitchFamily="34" charset="-122"/>
+                <a:cs typeface="Courier New" pitchFamily="34" charset="-120"/>
+              </a:rPr>
+              <a:t>10. śabda-tanmātra (sound)</a:t>
+            </a:r>
+            <a:endParaRPr lang="en-US" sz="1100" dirty="0"/>
+          </a:p>
+        </p:txBody>
+      </p:sp>
+      <p:sp>
+        <p:nvSpPr>
+          <p:cNvPr id="21" name="Text 19"/>
+          <p:cNvSpPr/>
+          <p:nvPr/>
+        </p:nvSpPr>
+        <p:spPr>
+          <a:xfrm>
+            <a:off x="631627" y="3803749"/>
+            <a:ext cx="8086939" cy="174575"/>
+          </a:xfrm>
+          <a:prstGeom prst="rect">
+            <a:avLst/>
+          </a:prstGeom>
+          <a:noFill/>
+          <a:ln/>
+        </p:spPr>
+        <p:txBody>
+          <a:bodyPr wrap="square" lIns="0" tIns="0" rIns="0" bIns="0" rtlCol="0" anchor="t"/>
+          <a:lstStyle/>
+          <a:p>
+            <a:pPr algn="l" indent="0" marL="0">
+              <a:lnSpc>
+                <a:spcPts val="1375"/>
+              </a:lnSpc>
+              <a:buNone/>
+            </a:pPr>
+            <a:r>
+              <a:rPr lang="en-US" sz="1100" dirty="0">
+                <a:solidFill>
+                  <a:srgbClr val="1A1A1A"/>
+                </a:solidFill>
+                <a:latin typeface="Courier New" pitchFamily="34" charset="0"/>
+                <a:ea typeface="Courier New" pitchFamily="34" charset="-122"/>
+                <a:cs typeface="Courier New" pitchFamily="34" charset="-120"/>
+              </a:rPr>
+              <a:t>9. sparśa-tanmātra (touch)</a:t>
+            </a:r>
+            <a:endParaRPr lang="en-US" sz="1100" dirty="0"/>
+          </a:p>
+        </p:txBody>
+      </p:sp>
+      <p:sp>
+        <p:nvSpPr>
+          <p:cNvPr id="22" name="Text 20"/>
+          <p:cNvSpPr/>
+          <p:nvPr/>
+        </p:nvSpPr>
+        <p:spPr>
+          <a:xfrm>
+            <a:off x="631627" y="3978325"/>
+            <a:ext cx="8086939" cy="174575"/>
+          </a:xfrm>
+          <a:prstGeom prst="rect">
+            <a:avLst/>
+          </a:prstGeom>
+          <a:noFill/>
+          <a:ln/>
+        </p:spPr>
+        <p:txBody>
+          <a:bodyPr wrap="square" lIns="0" tIns="0" rIns="0" bIns="0" rtlCol="0" anchor="t"/>
+          <a:lstStyle/>
+          <a:p>
+            <a:pPr algn="l" indent="0" marL="0">
+              <a:lnSpc>
+                <a:spcPts val="1375"/>
+              </a:lnSpc>
+              <a:buNone/>
+            </a:pPr>
+            <a:r>
+              <a:rPr lang="en-US" sz="1100" dirty="0">
+                <a:solidFill>
+                  <a:srgbClr val="1A1A1A"/>
+                </a:solidFill>
+                <a:latin typeface="Courier New" pitchFamily="34" charset="0"/>
+                <a:ea typeface="Courier New" pitchFamily="34" charset="-122"/>
+                <a:cs typeface="Courier New" pitchFamily="34" charset="-120"/>
+              </a:rPr>
+              <a:t>8. rūpa-tanmātra (form)</a:t>
+            </a:r>
+            <a:endParaRPr lang="en-US" sz="1100" dirty="0"/>
+          </a:p>
+        </p:txBody>
+      </p:sp>
+      <p:sp>
+        <p:nvSpPr>
+          <p:cNvPr id="23" name="Text 21"/>
+          <p:cNvSpPr/>
+          <p:nvPr/>
+        </p:nvSpPr>
+        <p:spPr>
+          <a:xfrm>
+            <a:off x="631627" y="4152900"/>
+            <a:ext cx="8086939" cy="174575"/>
+          </a:xfrm>
+          <a:prstGeom prst="rect">
+            <a:avLst/>
+          </a:prstGeom>
+          <a:noFill/>
+          <a:ln/>
+        </p:spPr>
+        <p:txBody>
+          <a:bodyPr wrap="square" lIns="0" tIns="0" rIns="0" bIns="0" rtlCol="0" anchor="t"/>
+          <a:lstStyle/>
+          <a:p>
+            <a:pPr algn="l" indent="0" marL="0">
+              <a:lnSpc>
+                <a:spcPts val="1375"/>
+              </a:lnSpc>
+              <a:buNone/>
+            </a:pPr>
+            <a:r>
+              <a:rPr lang="en-US" sz="1100" dirty="0">
+                <a:solidFill>
+                  <a:srgbClr val="1A1A1A"/>
+                </a:solidFill>
+                <a:latin typeface="Courier New" pitchFamily="34" charset="0"/>
+                <a:ea typeface="Courier New" pitchFamily="34" charset="-122"/>
+                <a:cs typeface="Courier New" pitchFamily="34" charset="-120"/>
+              </a:rPr>
+              <a:t>7. rasa-tanmātra (taste)</a:t>
+            </a:r>
+            <a:endParaRPr lang="en-US" sz="1100" dirty="0"/>
+          </a:p>
+        </p:txBody>
+      </p:sp>
+      <p:sp>
+        <p:nvSpPr>
+          <p:cNvPr id="24" name="Text 22"/>
+          <p:cNvSpPr/>
+          <p:nvPr/>
+        </p:nvSpPr>
+        <p:spPr>
+          <a:xfrm>
+            <a:off x="631627" y="4327475"/>
+            <a:ext cx="8086939" cy="174575"/>
+          </a:xfrm>
+          <a:prstGeom prst="rect">
+            <a:avLst/>
+          </a:prstGeom>
+          <a:noFill/>
+          <a:ln/>
+        </p:spPr>
+        <p:txBody>
+          <a:bodyPr wrap="square" lIns="0" tIns="0" rIns="0" bIns="0" rtlCol="0" anchor="t"/>
+          <a:lstStyle/>
+          <a:p>
+            <a:pPr algn="l" indent="0" marL="0">
+              <a:lnSpc>
+                <a:spcPts val="1375"/>
+              </a:lnSpc>
+              <a:buNone/>
+            </a:pPr>
+            <a:r>
+              <a:rPr lang="en-US" sz="1100" dirty="0">
+                <a:solidFill>
+                  <a:srgbClr val="1A1A1A"/>
+                </a:solidFill>
+                <a:latin typeface="Courier New" pitchFamily="34" charset="0"/>
+                <a:ea typeface="Courier New" pitchFamily="34" charset="-122"/>
+                <a:cs typeface="Courier New" pitchFamily="34" charset="-120"/>
+              </a:rPr>
+              <a:t>6. gandha-tanmātra (smell)</a:t>
+            </a:r>
+            <a:endParaRPr lang="en-US" sz="1100" dirty="0"/>
+          </a:p>
+        </p:txBody>
+      </p:sp>
+      <p:sp>
+        <p:nvSpPr>
+          <p:cNvPr id="25" name="Text 23"/>
+          <p:cNvSpPr/>
+          <p:nvPr/>
+        </p:nvSpPr>
+        <p:spPr>
+          <a:xfrm>
+            <a:off x="631627" y="4502051"/>
+            <a:ext cx="8086939" cy="174575"/>
+          </a:xfrm>
+          <a:prstGeom prst="rect">
+            <a:avLst/>
+          </a:prstGeom>
+          <a:noFill/>
+          <a:ln/>
+        </p:spPr>
+        <p:txBody>
+          <a:bodyPr wrap="square" lIns="0" tIns="0" rIns="0" bIns="0" rtlCol="0" anchor="t"/>
+          <a:lstStyle/>
+          <a:p>
+            <a:pPr algn="l" indent="0" marL="0">
+              <a:lnSpc>
+                <a:spcPts val="1375"/>
+              </a:lnSpc>
+              <a:buNone/>
+            </a:pPr>
+            <a:r>
+              <a:rPr lang="en-US" sz="1100" dirty="0">
+                <a:solidFill>
+                  <a:srgbClr val="1A1A1A"/>
+                </a:solidFill>
+                <a:latin typeface="Courier New" pitchFamily="34" charset="0"/>
+                <a:ea typeface="Courier New" pitchFamily="34" charset="-122"/>
+                <a:cs typeface="Courier New" pitchFamily="34" charset="-120"/>
+              </a:rPr>
+              <a:t>___________________________</a:t>
+            </a:r>
+            <a:endParaRPr lang="en-US" sz="1100" dirty="0"/>
+          </a:p>
+        </p:txBody>
+      </p:sp>
+      <p:sp>
+        <p:nvSpPr>
+          <p:cNvPr id="26" name="Text 24"/>
+          <p:cNvSpPr/>
+          <p:nvPr/>
+        </p:nvSpPr>
+        <p:spPr>
+          <a:xfrm>
+            <a:off x="631627" y="4676626"/>
+            <a:ext cx="8086939" cy="174575"/>
+          </a:xfrm>
+          <a:prstGeom prst="rect">
+            <a:avLst/>
+          </a:prstGeom>
+          <a:noFill/>
+          <a:ln/>
+        </p:spPr>
+        <p:txBody>
+          <a:bodyPr wrap="square" lIns="0" tIns="0" rIns="0" bIns="0" rtlCol="0" anchor="t"/>
+          <a:lstStyle/>
+          <a:p>
+            <a:pPr algn="l" indent="0" marL="0">
+              <a:lnSpc>
+                <a:spcPts val="1375"/>
+              </a:lnSpc>
+              <a:buNone/>
+            </a:pPr>
+            <a:r>
+              <a:rPr lang="en-US" sz="1100" dirty="0">
+                <a:solidFill>
+                  <a:srgbClr val="1A1A1A"/>
+                </a:solidFill>
+                <a:latin typeface="Courier New" pitchFamily="34" charset="0"/>
+                <a:ea typeface="Courier New" pitchFamily="34" charset="-122"/>
+                <a:cs typeface="Courier New" pitchFamily="34" charset="-120"/>
+              </a:rPr>
+              <a:t>Mahābhūtas (gross elements, 5–1):</a:t>
+            </a:r>
+            <a:endParaRPr lang="en-US" sz="1100" dirty="0"/>
+          </a:p>
+        </p:txBody>
+      </p:sp>
+      <p:sp>
+        <p:nvSpPr>
+          <p:cNvPr id="27" name="Text 25"/>
+          <p:cNvSpPr/>
+          <p:nvPr/>
+        </p:nvSpPr>
+        <p:spPr>
+          <a:xfrm>
+            <a:off x="631627" y="4851202"/>
+            <a:ext cx="8086939" cy="174575"/>
+          </a:xfrm>
+          <a:prstGeom prst="rect">
+            <a:avLst/>
+          </a:prstGeom>
+          <a:noFill/>
+          <a:ln/>
+        </p:spPr>
+        <p:txBody>
+          <a:bodyPr wrap="square" lIns="0" tIns="0" rIns="0" bIns="0" rtlCol="0" anchor="t"/>
+          <a:lstStyle/>
+          <a:p>
+            <a:pPr algn="l" indent="0" marL="0">
+              <a:lnSpc>
+                <a:spcPts val="1375"/>
+              </a:lnSpc>
+              <a:buNone/>
+            </a:pPr>
+            <a:r>
+              <a:rPr lang="en-US" sz="1100" dirty="0">
+                <a:solidFill>
+                  <a:srgbClr val="1A1A1A"/>
+                </a:solidFill>
+                <a:latin typeface="Courier New" pitchFamily="34" charset="0"/>
+                <a:ea typeface="Courier New" pitchFamily="34" charset="-122"/>
+                <a:cs typeface="Courier New" pitchFamily="34" charset="-120"/>
+              </a:rPr>
+              <a:t>5. ākāśa (space)</a:t>
+            </a:r>
+            <a:endParaRPr lang="en-US" sz="1100" dirty="0"/>
+          </a:p>
+        </p:txBody>
+      </p:sp>
+      <p:sp>
+        <p:nvSpPr>
+          <p:cNvPr id="28" name="Text 26"/>
+          <p:cNvSpPr/>
+          <p:nvPr/>
+        </p:nvSpPr>
+        <p:spPr>
+          <a:xfrm>
+            <a:off x="631627" y="5025777"/>
+            <a:ext cx="8086939" cy="174575"/>
+          </a:xfrm>
+          <a:prstGeom prst="rect">
+            <a:avLst/>
+          </a:prstGeom>
+          <a:noFill/>
+          <a:ln/>
+        </p:spPr>
+        <p:txBody>
+          <a:bodyPr wrap="square" lIns="0" tIns="0" rIns="0" bIns="0" rtlCol="0" anchor="t"/>
+          <a:lstStyle/>
+          <a:p>
+            <a:pPr algn="l" indent="0" marL="0">
+              <a:lnSpc>
+                <a:spcPts val="1375"/>
+              </a:lnSpc>
+              <a:buNone/>
+            </a:pPr>
+            <a:r>
+              <a:rPr lang="en-US" sz="1100" dirty="0">
+                <a:solidFill>
+                  <a:srgbClr val="1A1A1A"/>
+                </a:solidFill>
+                <a:latin typeface="Courier New" pitchFamily="34" charset="0"/>
+                <a:ea typeface="Courier New" pitchFamily="34" charset="-122"/>
+                <a:cs typeface="Courier New" pitchFamily="34" charset="-120"/>
+              </a:rPr>
+              <a:t>4. vāyu (air)</a:t>
+            </a:r>
+            <a:endParaRPr lang="en-US" sz="1100" dirty="0"/>
+          </a:p>
+        </p:txBody>
+      </p:sp>
+      <p:sp>
+        <p:nvSpPr>
+          <p:cNvPr id="29" name="Text 27"/>
+          <p:cNvSpPr/>
+          <p:nvPr/>
+        </p:nvSpPr>
+        <p:spPr>
+          <a:xfrm>
+            <a:off x="631627" y="5200352"/>
+            <a:ext cx="8086939" cy="174575"/>
+          </a:xfrm>
+          <a:prstGeom prst="rect">
+            <a:avLst/>
+          </a:prstGeom>
+          <a:noFill/>
+          <a:ln/>
+        </p:spPr>
+        <p:txBody>
+          <a:bodyPr wrap="square" lIns="0" tIns="0" rIns="0" bIns="0" rtlCol="0" anchor="t"/>
+          <a:lstStyle/>
+          <a:p>
+            <a:pPr algn="l" indent="0" marL="0">
+              <a:lnSpc>
+                <a:spcPts val="1375"/>
+              </a:lnSpc>
+              <a:buNone/>
+            </a:pPr>
+            <a:r>
+              <a:rPr lang="en-US" sz="1100" dirty="0">
+                <a:solidFill>
+                  <a:srgbClr val="1A1A1A"/>
+                </a:solidFill>
+                <a:latin typeface="Courier New" pitchFamily="34" charset="0"/>
+                <a:ea typeface="Courier New" pitchFamily="34" charset="-122"/>
+                <a:cs typeface="Courier New" pitchFamily="34" charset="-120"/>
+              </a:rPr>
+              <a:t>3. tejas (fire)</a:t>
+            </a:r>
+            <a:endParaRPr lang="en-US" sz="1100" dirty="0"/>
+          </a:p>
+        </p:txBody>
+      </p:sp>
+      <p:sp>
+        <p:nvSpPr>
+          <p:cNvPr id="30" name="Text 28"/>
+          <p:cNvSpPr/>
+          <p:nvPr/>
+        </p:nvSpPr>
+        <p:spPr>
+          <a:xfrm>
+            <a:off x="631627" y="5374928"/>
+            <a:ext cx="8086939" cy="174575"/>
+          </a:xfrm>
+          <a:prstGeom prst="rect">
+            <a:avLst/>
+          </a:prstGeom>
+          <a:noFill/>
+          <a:ln/>
+        </p:spPr>
+        <p:txBody>
+          <a:bodyPr wrap="square" lIns="0" tIns="0" rIns="0" bIns="0" rtlCol="0" anchor="t"/>
+          <a:lstStyle/>
+          <a:p>
+            <a:pPr algn="l" indent="0" marL="0">
+              <a:lnSpc>
+                <a:spcPts val="1375"/>
+              </a:lnSpc>
+              <a:buNone/>
+            </a:pPr>
+            <a:r>
+              <a:rPr lang="en-US" sz="1100" dirty="0">
+                <a:solidFill>
+                  <a:srgbClr val="1A1A1A"/>
+                </a:solidFill>
+                <a:latin typeface="Courier New" pitchFamily="34" charset="0"/>
+                <a:ea typeface="Courier New" pitchFamily="34" charset="-122"/>
+                <a:cs typeface="Courier New" pitchFamily="34" charset="-120"/>
+              </a:rPr>
+              <a:t>2. ap (water)</a:t>
+            </a:r>
+            <a:endParaRPr lang="en-US" sz="1100" dirty="0"/>
+          </a:p>
+        </p:txBody>
+      </p:sp>
+      <p:sp>
+        <p:nvSpPr>
+          <p:cNvPr id="31" name="Text 29"/>
+          <p:cNvSpPr/>
+          <p:nvPr/>
+        </p:nvSpPr>
+        <p:spPr>
+          <a:xfrm>
+            <a:off x="631627" y="5549503"/>
+            <a:ext cx="8086939" cy="174575"/>
+          </a:xfrm>
+          <a:prstGeom prst="rect">
+            <a:avLst/>
+          </a:prstGeom>
+          <a:noFill/>
+          <a:ln/>
+        </p:spPr>
+        <p:txBody>
+          <a:bodyPr wrap="square" lIns="0" tIns="0" rIns="0" bIns="0" rtlCol="0" anchor="t"/>
+          <a:lstStyle/>
+          <a:p>
+            <a:pPr algn="l" indent="0" marL="0">
+              <a:lnSpc>
+                <a:spcPts val="1375"/>
+              </a:lnSpc>
+              <a:buNone/>
+            </a:pPr>
+            <a:r>
+              <a:rPr lang="en-US" sz="1100" dirty="0">
+                <a:solidFill>
+                  <a:srgbClr val="1A1A1A"/>
+                </a:solidFill>
+                <a:latin typeface="Courier New" pitchFamily="34" charset="0"/>
+                <a:ea typeface="Courier New" pitchFamily="34" charset="-122"/>
+                <a:cs typeface="Courier New" pitchFamily="34" charset="-120"/>
+              </a:rPr>
+              <a:t>1. pṛthvī (earth)</a:t>
+            </a:r>
+            <a:endParaRPr lang="en-US" sz="1100" dirty="0"/>
+          </a:p>
+        </p:txBody>
+      </p:sp>
+      <p:sp>
+        <p:nvSpPr>
+          <p:cNvPr id="32" name="Text 30"/>
+          <p:cNvSpPr/>
+          <p:nvPr/>
+        </p:nvSpPr>
+        <p:spPr>
+          <a:xfrm>
+            <a:off x="406301" y="6016079"/>
             <a:ext cx="8498026" cy="213271"/>
           </a:xfrm>
           <a:prstGeom prst="rect">
@@ -5071,7 +6225,7 @@
                 <a:ea typeface="Times New Roman" pitchFamily="34" charset="-122"/>
                 <a:cs typeface="Times New Roman" pitchFamily="34" charset="-120"/>
               </a:rPr>
-              <a:t>Differentiation</a:t>
+              <a:t>Core (25 min) (cont.)</a:t>
             </a:r>
             <a:endParaRPr lang="en-US" sz="1800" dirty="0"/>
           </a:p>
@@ -5085,8 +6239,8 @@
         </p:nvSpPr>
         <p:spPr>
           <a:xfrm>
-            <a:off x="634901" y="883593"/>
-            <a:ext cx="8102798" cy="525661"/>
+            <a:off x="406301" y="870942"/>
+            <a:ext cx="8498026" cy="426541"/>
           </a:xfrm>
           <a:prstGeom prst="rect">
             <a:avLst/>
@@ -5098,18 +6252,20 @@
           <a:bodyPr wrap="square" lIns="0" tIns="0" rIns="0" bIns="0" rtlCol="0" anchor="t"/>
           <a:lstStyle/>
           <a:p>
-            <a:pPr algn="l" marL="342900" indent="-342900">
-              <a:lnSpc>
-                <a:spcPts val="1620"/>
-              </a:lnSpc>
-              <a:spcAft>
-                <a:spcPts val="300"/>
-              </a:spcAft>
-              <a:buSzPct val="100000"/>
-              <a:buChar char="•"/>
-            </a:pPr>
-            <a:r>
-              <a:rPr lang="en-US" sz="1200" b="1" dirty="0">
+            <a:pPr algn="l" indent="0" marL="0">
+              <a:lnSpc>
+                <a:spcPts val="1680"/>
+              </a:lnSpc>
+              <a:spcBef>
+                <a:spcPts val="300"/>
+              </a:spcBef>
+              <a:spcAft>
+                <a:spcPts val="300"/>
+              </a:spcAft>
+              <a:buNone/>
+            </a:pPr>
+            <a:r>
+              <a:rPr lang="en-US" sz="1200" i="1" dirty="0">
                 <a:solidFill>
                   <a:srgbClr val="1A1A1A"/>
                 </a:solidFill>
@@ -5117,71 +6273,7 @@
                 <a:ea typeface="Georgia" pitchFamily="34" charset="-122"/>
                 <a:cs typeface="Georgia" pitchFamily="34" charset="-120"/>
               </a:rPr>
-              <a:t>Tier up:</a:t>
-            </a:r>
-            <a:pPr algn="l" indent="0" marL="0">
-              <a:lnSpc>
-                <a:spcPts val="1620"/>
-              </a:lnSpc>
-              <a:spcAft>
-                <a:spcPts val="300"/>
-              </a:spcAft>
-              <a:buNone/>
-            </a:pPr>
-            <a:r>
-              <a:rPr lang="en-US" sz="1200" dirty="0">
-                <a:solidFill>
-                  <a:srgbClr val="1A1A1A"/>
-                </a:solidFill>
-                <a:latin typeface="Georgia" pitchFamily="34" charset="0"/>
-                <a:ea typeface="Georgia" pitchFamily="34" charset="-122"/>
-                <a:cs typeface="Georgia" pitchFamily="34" charset="-120"/>
-              </a:rPr>
-              <a:t> Read the full first 22 verses of the Sāṅkhya Kārikā in translation. Note one verse you find puzzling.</a:t>
-            </a:r>
-            <a:endParaRPr lang="en-US" sz="1200" dirty="0"/>
-          </a:p>
-          <a:p>
-            <a:pPr algn="l" marL="342900" indent="-342900">
-              <a:lnSpc>
-                <a:spcPts val="1620"/>
-              </a:lnSpc>
-              <a:spcAft>
-                <a:spcPts val="300"/>
-              </a:spcAft>
-              <a:buSzPct val="100000"/>
-              <a:buChar char="•"/>
-            </a:pPr>
-            <a:r>
-              <a:rPr lang="en-US" sz="1200" b="1" dirty="0">
-                <a:solidFill>
-                  <a:srgbClr val="1A1A1A"/>
-                </a:solidFill>
-                <a:latin typeface="Georgia" pitchFamily="34" charset="0"/>
-                <a:ea typeface="Georgia" pitchFamily="34" charset="-122"/>
-                <a:cs typeface="Georgia" pitchFamily="34" charset="-120"/>
-              </a:rPr>
-              <a:t>Tier down:</a:t>
-            </a:r>
-            <a:pPr algn="l" indent="0" marL="0">
-              <a:lnSpc>
-                <a:spcPts val="1620"/>
-              </a:lnSpc>
-              <a:spcAft>
-                <a:spcPts val="300"/>
-              </a:spcAft>
-              <a:buNone/>
-            </a:pPr>
-            <a:r>
-              <a:rPr lang="en-US" sz="1200" dirty="0">
-                <a:solidFill>
-                  <a:srgbClr val="1A1A1A"/>
-                </a:solidFill>
-                <a:latin typeface="Georgia" pitchFamily="34" charset="0"/>
-                <a:ea typeface="Georgia" pitchFamily="34" charset="-122"/>
-                <a:cs typeface="Georgia" pitchFamily="34" charset="-120"/>
-              </a:rPr>
-              <a:t> Focus on the bhūtas + tanmātras layer. The full ladder can be a reference.</a:t>
+              <a:t>(Numbering convention varies in different Sāṅkhya texts; here we count from the most concrete (1 = earth) up to the most abstract (24 = prakṛti) with puruṣa as the silent 25th. Other texts count from puruṣa down.)</a:t>
             </a:r>
             <a:endParaRPr lang="en-US" sz="1200" dirty="0"/>
           </a:p>
@@ -5339,7 +6431,7 @@
                 <a:ea typeface="Times New Roman" pitchFamily="34" charset="-122"/>
                 <a:cs typeface="Times New Roman" pitchFamily="34" charset="-120"/>
               </a:rPr>
-              <a:t>Teacher notes</a:t>
+              <a:t>Core (25 min) (cont.)</a:t>
             </a:r>
             <a:endParaRPr lang="en-US" sz="1800" dirty="0"/>
           </a:p>
@@ -5353,8 +6445,8 @@
         </p:nvSpPr>
         <p:spPr>
           <a:xfrm>
-            <a:off x="406301" y="870942"/>
-            <a:ext cx="8498026" cy="639812"/>
+            <a:off x="634901" y="883593"/>
+            <a:ext cx="8102798" cy="281880"/>
           </a:xfrm>
           <a:prstGeom prst="rect">
             <a:avLst/>
@@ -5366,20 +6458,18 @@
           <a:bodyPr wrap="square" lIns="0" tIns="0" rIns="0" bIns="0" rtlCol="0" anchor="t"/>
           <a:lstStyle/>
           <a:p>
-            <a:pPr algn="l" indent="0" marL="0">
-              <a:lnSpc>
-                <a:spcPts val="1680"/>
-              </a:lnSpc>
-              <a:spcBef>
-                <a:spcPts val="300"/>
-              </a:spcBef>
-              <a:spcAft>
-                <a:spcPts val="300"/>
-              </a:spcAft>
-              <a:buNone/>
-            </a:pPr>
-            <a:r>
-              <a:rPr lang="en-US" sz="1200" dirty="0">
+            <a:pPr algn="l" marL="342900" indent="-342900">
+              <a:lnSpc>
+                <a:spcPts val="1620"/>
+              </a:lnSpc>
+              <a:spcAft>
+                <a:spcPts val="300"/>
+              </a:spcAft>
+              <a:buSzPct val="100000"/>
+              <a:buChar char="•"/>
+            </a:pPr>
+            <a:r>
+              <a:rPr lang="en-US" sz="1200" b="1" dirty="0">
                 <a:solidFill>
                   <a:srgbClr val="1A1A1A"/>
                 </a:solidFill>
@@ -5387,22 +6477,45 @@
                 <a:ea typeface="Georgia" pitchFamily="34" charset="-122"/>
                 <a:cs typeface="Georgia" pitchFamily="34" charset="-120"/>
               </a:rPr>
-              <a:t>– The 25-tattva count is the </a:t>
-            </a:r>
-            <a:pPr algn="l" indent="0" marL="0">
-              <a:lnSpc>
-                <a:spcPts val="1680"/>
-              </a:lnSpc>
-              <a:spcBef>
-                <a:spcPts val="300"/>
-              </a:spcBef>
-              <a:spcAft>
-                <a:spcPts val="300"/>
-              </a:spcAft>
-              <a:buNone/>
-            </a:pPr>
-            <a:r>
-              <a:rPr lang="en-US" sz="1200" i="1" dirty="0">
+              <a:t>The key structural insight:</a:t>
+            </a:r>
+            <a:endParaRPr lang="en-US" sz="1200" dirty="0"/>
+          </a:p>
+        </p:txBody>
+      </p:sp>
+      <p:sp>
+        <p:nvSpPr>
+          <p:cNvPr id="5" name="Text 3"/>
+          <p:cNvSpPr/>
+          <p:nvPr/>
+        </p:nvSpPr>
+        <p:spPr>
+          <a:xfrm>
+            <a:off x="634901" y="1266974"/>
+            <a:ext cx="8102798" cy="1013222"/>
+          </a:xfrm>
+          <a:prstGeom prst="rect">
+            <a:avLst/>
+          </a:prstGeom>
+          <a:noFill/>
+          <a:ln/>
+        </p:spPr>
+        <p:txBody>
+          <a:bodyPr wrap="square" lIns="0" tIns="0" rIns="0" bIns="0" rtlCol="0" anchor="t"/>
+          <a:lstStyle/>
+          <a:p>
+            <a:pPr algn="l" marL="342900" indent="-342900">
+              <a:lnSpc>
+                <a:spcPts val="1620"/>
+              </a:lnSpc>
+              <a:spcAft>
+                <a:spcPts val="300"/>
+              </a:spcAft>
+              <a:buSzPct val="100000"/>
+              <a:buChar char="•"/>
+            </a:pPr>
+            <a:r>
+              <a:rPr lang="en-US" sz="1200" dirty="0">
                 <a:solidFill>
                   <a:srgbClr val="1A1A1A"/>
                 </a:solidFill>
@@ -5410,22 +6523,19 @@
                 <a:ea typeface="Georgia" pitchFamily="34" charset="-122"/>
                 <a:cs typeface="Georgia" pitchFamily="34" charset="-120"/>
               </a:rPr>
-              <a:t>classical Sāṅkhya</a:t>
-            </a:r>
-            <a:pPr algn="l" indent="0" marL="0">
-              <a:lnSpc>
-                <a:spcPts val="1680"/>
-              </a:lnSpc>
-              <a:spcBef>
-                <a:spcPts val="300"/>
-              </a:spcBef>
-              <a:spcAft>
-                <a:spcPts val="300"/>
-              </a:spcAft>
-              <a:buNone/>
-            </a:pPr>
-            <a:r>
-              <a:rPr lang="en-US" sz="1200" dirty="0">
+              <a:t>The five gross elements (</a:t>
+            </a:r>
+            <a:pPr algn="l" indent="0" marL="0">
+              <a:lnSpc>
+                <a:spcPts val="1620"/>
+              </a:lnSpc>
+              <a:spcAft>
+                <a:spcPts val="300"/>
+              </a:spcAft>
+              <a:buNone/>
+            </a:pPr>
+            <a:r>
+              <a:rPr lang="en-US" sz="1200" i="1" dirty="0">
                 <a:solidFill>
                   <a:srgbClr val="1A1A1A"/>
                 </a:solidFill>
@@ -5433,22 +6543,19 @@
                 <a:ea typeface="Georgia" pitchFamily="34" charset="-122"/>
                 <a:cs typeface="Georgia" pitchFamily="34" charset="-120"/>
               </a:rPr>
-              <a:t> count (Īśvarakṛṣṇa's </a:t>
-            </a:r>
-            <a:pPr algn="l" indent="0" marL="0">
-              <a:lnSpc>
-                <a:spcPts val="1680"/>
-              </a:lnSpc>
-              <a:spcBef>
-                <a:spcPts val="300"/>
-              </a:spcBef>
-              <a:spcAft>
-                <a:spcPts val="300"/>
-              </a:spcAft>
-              <a:buNone/>
-            </a:pPr>
-            <a:r>
-              <a:rPr lang="en-US" sz="1200" i="1" dirty="0">
+              <a:t>mahābhūtas</a:t>
+            </a:r>
+            <a:pPr algn="l" indent="0" marL="0">
+              <a:lnSpc>
+                <a:spcPts val="1620"/>
+              </a:lnSpc>
+              <a:spcAft>
+                <a:spcPts val="300"/>
+              </a:spcAft>
+              <a:buNone/>
+            </a:pPr>
+            <a:r>
+              <a:rPr lang="en-US" sz="1200" dirty="0">
                 <a:solidFill>
                   <a:srgbClr val="1A1A1A"/>
                 </a:solidFill>
@@ -5456,19 +6563,20 @@
                 <a:ea typeface="Georgia" pitchFamily="34" charset="-122"/>
                 <a:cs typeface="Georgia" pitchFamily="34" charset="-120"/>
               </a:rPr>
-              <a:t>Sāṅkhya Kārikā</a:t>
-            </a:r>
-            <a:pPr algn="l" indent="0" marL="0">
-              <a:lnSpc>
-                <a:spcPts val="1680"/>
-              </a:lnSpc>
-              <a:spcBef>
-                <a:spcPts val="300"/>
-              </a:spcBef>
-              <a:spcAft>
-                <a:spcPts val="300"/>
-              </a:spcAft>
-              <a:buNone/>
+              <a:t>) are the LAST and most concrete layer.</a:t>
+            </a:r>
+            <a:endParaRPr lang="en-US" sz="1200" dirty="0"/>
+          </a:p>
+          <a:p>
+            <a:pPr algn="l" marL="342900" indent="-342900">
+              <a:lnSpc>
+                <a:spcPts val="1620"/>
+              </a:lnSpc>
+              <a:spcAft>
+                <a:spcPts val="300"/>
+              </a:spcAft>
+              <a:buSzPct val="100000"/>
+              <a:buChar char="•"/>
             </a:pPr>
             <a:r>
               <a:rPr lang="en-US" sz="1200" dirty="0">
@@ -5479,15 +6587,12 @@
                 <a:ea typeface="Georgia" pitchFamily="34" charset="-122"/>
                 <a:cs typeface="Georgia" pitchFamily="34" charset="-120"/>
               </a:rPr>
-              <a:t>, c. 4th c. CE). Different versions of Sāṅkhya count differently. – Be honest about the </a:t>
-            </a:r>
-            <a:pPr algn="l" indent="0" marL="0">
-              <a:lnSpc>
-                <a:spcPts val="1680"/>
-              </a:lnSpc>
-              <a:spcBef>
-                <a:spcPts val="300"/>
-              </a:spcBef>
+              <a:t>Each is paired with a </a:t>
+            </a:r>
+            <a:pPr algn="l" indent="0" marL="0">
+              <a:lnSpc>
+                <a:spcPts val="1620"/>
+              </a:lnSpc>
               <a:spcAft>
                 <a:spcPts val="300"/>
               </a:spcAft>
@@ -5502,15 +6607,12 @@
                 <a:ea typeface="Georgia" pitchFamily="34" charset="-122"/>
                 <a:cs typeface="Georgia" pitchFamily="34" charset="-120"/>
               </a:rPr>
-              <a:t>non-theistic</a:t>
-            </a:r>
-            <a:pPr algn="l" indent="0" marL="0">
-              <a:lnSpc>
-                <a:spcPts val="1680"/>
-              </a:lnSpc>
-              <a:spcBef>
-                <a:spcPts val="300"/>
-              </a:spcBef>
+              <a:t>tanmātra</a:t>
+            </a:r>
+            <a:pPr algn="l" indent="0" marL="0">
+              <a:lnSpc>
+                <a:spcPts val="1620"/>
+              </a:lnSpc>
               <a:spcAft>
                 <a:spcPts val="300"/>
               </a:spcAft>
@@ -5525,22 +6627,23 @@
                 <a:ea typeface="Georgia" pitchFamily="34" charset="-122"/>
                 <a:cs typeface="Georgia" pitchFamily="34" charset="-120"/>
               </a:rPr>
-              <a:t> character of classical Sāṅkhya. It does NOT include a creator god as a tattva. The Yoga school (</a:t>
-            </a:r>
-            <a:pPr algn="l" indent="0" marL="0">
-              <a:lnSpc>
-                <a:spcPts val="1680"/>
-              </a:lnSpc>
-              <a:spcBef>
-                <a:spcPts val="300"/>
-              </a:spcBef>
-              <a:spcAft>
-                <a:spcPts val="300"/>
-              </a:spcAft>
-              <a:buNone/>
-            </a:pPr>
-            <a:r>
-              <a:rPr lang="en-US" sz="1200" i="1" dirty="0">
+              <a:t> (subtle quality, the perceptual essence).</a:t>
+            </a:r>
+            <a:endParaRPr lang="en-US" sz="1200" dirty="0"/>
+          </a:p>
+          <a:p>
+            <a:pPr algn="l" marL="342900" indent="-342900">
+              <a:lnSpc>
+                <a:spcPts val="1620"/>
+              </a:lnSpc>
+              <a:spcAft>
+                <a:spcPts val="300"/>
+              </a:spcAft>
+              <a:buSzPct val="100000"/>
+              <a:buChar char="•"/>
+            </a:pPr>
+            <a:r>
+              <a:rPr lang="en-US" sz="1200" dirty="0">
                 <a:solidFill>
                   <a:srgbClr val="1A1A1A"/>
                 </a:solidFill>
@@ -5548,19 +6651,20 @@
                 <a:ea typeface="Georgia" pitchFamily="34" charset="-122"/>
                 <a:cs typeface="Georgia" pitchFamily="34" charset="-120"/>
               </a:rPr>
-              <a:t>Yoga Sūtras</a:t>
-            </a:r>
-            <a:pPr algn="l" indent="0" marL="0">
-              <a:lnSpc>
-                <a:spcPts val="1680"/>
-              </a:lnSpc>
-              <a:spcBef>
-                <a:spcPts val="300"/>
-              </a:spcBef>
-              <a:spcAft>
-                <a:spcPts val="300"/>
-              </a:spcAft>
-              <a:buNone/>
+              <a:t>Each tanmātra is what the corresponding sense-organ perceives.</a:t>
+            </a:r>
+            <a:endParaRPr lang="en-US" sz="1200" dirty="0"/>
+          </a:p>
+          <a:p>
+            <a:pPr algn="l" marL="342900" indent="-342900">
+              <a:lnSpc>
+                <a:spcPts val="1620"/>
+              </a:lnSpc>
+              <a:spcAft>
+                <a:spcPts val="300"/>
+              </a:spcAft>
+              <a:buSzPct val="100000"/>
+              <a:buChar char="•"/>
             </a:pPr>
             <a:r>
               <a:rPr lang="en-US" sz="1200" dirty="0">
@@ -5571,53 +6675,7 @@
                 <a:ea typeface="Georgia" pitchFamily="34" charset="-122"/>
                 <a:cs typeface="Georgia" pitchFamily="34" charset="-120"/>
               </a:rPr>
-              <a:t>) adds </a:t>
-            </a:r>
-            <a:pPr algn="l" indent="0" marL="0">
-              <a:lnSpc>
-                <a:spcPts val="1680"/>
-              </a:lnSpc>
-              <a:spcBef>
-                <a:spcPts val="300"/>
-              </a:spcBef>
-              <a:spcAft>
-                <a:spcPts val="300"/>
-              </a:spcAft>
-              <a:buNone/>
-            </a:pPr>
-            <a:r>
-              <a:rPr lang="en-US" sz="1200" i="1" dirty="0">
-                <a:solidFill>
-                  <a:srgbClr val="1A1A1A"/>
-                </a:solidFill>
-                <a:latin typeface="Georgia" pitchFamily="34" charset="0"/>
-                <a:ea typeface="Georgia" pitchFamily="34" charset="-122"/>
-                <a:cs typeface="Georgia" pitchFamily="34" charset="-120"/>
-              </a:rPr>
-              <a:t>Īśvara</a:t>
-            </a:r>
-            <a:pPr algn="l" indent="0" marL="0">
-              <a:lnSpc>
-                <a:spcPts val="1680"/>
-              </a:lnSpc>
-              <a:spcBef>
-                <a:spcPts val="300"/>
-              </a:spcBef>
-              <a:spcAft>
-                <a:spcPts val="300"/>
-              </a:spcAft>
-              <a:buNone/>
-            </a:pPr>
-            <a:r>
-              <a:rPr lang="en-US" sz="1200" dirty="0">
-                <a:solidFill>
-                  <a:srgbClr val="1A1A1A"/>
-                </a:solidFill>
-                <a:latin typeface="Georgia" pitchFamily="34" charset="0"/>
-                <a:ea typeface="Georgia" pitchFamily="34" charset="-122"/>
-                <a:cs typeface="Georgia" pitchFamily="34" charset="-120"/>
-              </a:rPr>
-              <a:t> as a separate principle; classical Sāṅkhya does not.</a:t>
+              <a:t>The whole scheme is internally consistent: the bhūtas, tanmātras, and indriyas line up in a tight one-to-one mapping.</a:t>
             </a:r>
             <a:endParaRPr lang="en-US" sz="1200" dirty="0"/>
           </a:p>
@@ -5625,7 +6683,7 @@
       </p:sp>
       <p:sp>
         <p:nvSpPr>
-          <p:cNvPr id="5" name="Text 3"/>
+          <p:cNvPr id="6" name="Text 4"/>
           <p:cNvSpPr/>
           <p:nvPr/>
         </p:nvSpPr>
